--- a/Calendario2025/Presentaciones/11_1_ACLs.pptx
+++ b/Calendario2025/Presentaciones/11_1_ACLs.pptx
@@ -5,7 +5,7 @@
     <p:sldMasterId id="2147483648" r:id="rId1"/>
   </p:sldMasterIdLst>
   <p:notesMasterIdLst>
-    <p:notesMasterId r:id="rId18"/>
+    <p:notesMasterId r:id="rId16"/>
   </p:notesMasterIdLst>
   <p:sldIdLst>
     <p:sldId id="257" r:id="rId2"/>
@@ -16,14 +16,12 @@
     <p:sldId id="265" r:id="rId7"/>
     <p:sldId id="266" r:id="rId8"/>
     <p:sldId id="267" r:id="rId9"/>
-    <p:sldId id="268" r:id="rId10"/>
-    <p:sldId id="324" r:id="rId11"/>
-    <p:sldId id="326" r:id="rId12"/>
-    <p:sldId id="1110" r:id="rId13"/>
-    <p:sldId id="1136" r:id="rId14"/>
-    <p:sldId id="1111" r:id="rId15"/>
-    <p:sldId id="269" r:id="rId16"/>
-    <p:sldId id="325" r:id="rId17"/>
+    <p:sldId id="326" r:id="rId10"/>
+    <p:sldId id="1110" r:id="rId11"/>
+    <p:sldId id="1136" r:id="rId12"/>
+    <p:sldId id="1111" r:id="rId13"/>
+    <p:sldId id="269" r:id="rId14"/>
+    <p:sldId id="325" r:id="rId15"/>
   </p:sldIdLst>
   <p:sldSz cx="9144000" cy="6858000" type="screen4x3"/>
   <p:notesSz cx="6858000" cy="9144000"/>
@@ -223,7 +221,7 @@
           <a:p>
             <a:fld id="{2D445F07-8756-451B-A938-0248325FC7BB}" type="datetimeFigureOut">
               <a:rPr lang="es-MX" smtClean="0"/>
-              <a:t>24/04/2023</a:t>
+              <a:t>15/04/2025</a:t>
             </a:fld>
             <a:endParaRPr lang="es-MX" dirty="0"/>
           </a:p>
@@ -382,7 +380,7 @@
           <a:p>
             <a:fld id="{5993AEC0-242E-4FA7-9D3C-51E1036AC3CB}" type="slidenum">
               <a:rPr lang="es-MX" smtClean="0"/>
-              <a:t>‹Nº›</a:t>
+              <a:t>‹#›</a:t>
             </a:fld>
             <a:endParaRPr lang="es-MX" dirty="0"/>
           </a:p>
@@ -594,7 +592,19 @@
       </p:grpSpPr>
       <p:sp>
         <p:nvSpPr>
-          <p:cNvPr id="2" name="Notes Placeholder"/>
+          <p:cNvPr id="2" name="Slide Image Placeholder 1"/>
+          <p:cNvSpPr>
+            <a:spLocks noGrp="1" noRot="1" noChangeAspect="1"/>
+          </p:cNvSpPr>
+          <p:nvPr>
+            <p:ph type="sldImg"/>
+          </p:nvPr>
+        </p:nvSpPr>
+        <p:spPr/>
+      </p:sp>
+      <p:sp>
+        <p:nvSpPr>
+          <p:cNvPr id="3" name="Notes Placeholder 2"/>
           <p:cNvSpPr>
             <a:spLocks noGrp="1"/>
           </p:cNvSpPr>
@@ -604,19 +614,59 @@
         </p:nvSpPr>
         <p:spPr/>
         <p:txBody>
-          <a:bodyPr>
-            <a:normAutofit/>
-          </a:bodyPr>
+          <a:bodyPr/>
           <a:lstStyle/>
           <a:p>
-            <a:endParaRPr dirty="0"/>
+            <a:pPr rtl="0"/>
+            <a:r>
+              <a:rPr lang="es-419"/>
+              <a:t>5.0 - ACL para la configuración IPv4	</a:t>
+            </a:r>
+          </a:p>
+          <a:p>
+            <a:pPr rtl="0"/>
+            <a:r>
+              <a:rPr lang="es-419"/>
+              <a:t>5.4 Configuración de ACL IPv4 extendidas</a:t>
+            </a:r>
+          </a:p>
+          <a:p>
+            <a:pPr rtl="0"/>
+            <a:r>
+              <a:rPr lang="es-419"/>
+              <a:t>5.4.3 — Protocolos y puertos</a:t>
+            </a:r>
+          </a:p>
+        </p:txBody>
+      </p:sp>
+      <p:sp>
+        <p:nvSpPr>
+          <p:cNvPr id="4" name="Slide Number Placeholder 3"/>
+          <p:cNvSpPr>
+            <a:spLocks noGrp="1"/>
+          </p:cNvSpPr>
+          <p:nvPr>
+            <p:ph type="sldNum" sz="quarter" idx="5"/>
+          </p:nvPr>
+        </p:nvSpPr>
+        <p:spPr/>
+        <p:txBody>
+          <a:bodyPr/>
+          <a:lstStyle/>
+          <a:p>
+            <a:pPr rtl="0"/>
+            <a:fld id="{5641018C-6CAF-B84E-B92C-ECB119457FBA}" type="slidenum">
+              <a:rPr/>
+              <a:t>10</a:t>
+            </a:fld>
+            <a:endParaRPr/>
           </a:p>
         </p:txBody>
       </p:sp>
     </p:spTree>
     <p:extLst>
       <p:ext uri="{BB962C8B-B14F-4D97-AF65-F5344CB8AC3E}">
-        <p14:creationId xmlns:p14="http://schemas.microsoft.com/office/powerpoint/2010/main" val="3775140461"/>
+        <p14:creationId xmlns:p14="http://schemas.microsoft.com/office/powerpoint/2010/main" val="2393749194"/>
       </p:ext>
     </p:extLst>
   </p:cSld>
@@ -645,7 +695,19 @@
       </p:grpSpPr>
       <p:sp>
         <p:nvSpPr>
-          <p:cNvPr id="2" name="Notes Placeholder"/>
+          <p:cNvPr id="2" name="Slide Image Placeholder 1"/>
+          <p:cNvSpPr>
+            <a:spLocks noGrp="1" noRot="1" noChangeAspect="1"/>
+          </p:cNvSpPr>
+          <p:nvPr>
+            <p:ph type="sldImg"/>
+          </p:nvPr>
+        </p:nvSpPr>
+        <p:spPr/>
+      </p:sp>
+      <p:sp>
+        <p:nvSpPr>
+          <p:cNvPr id="3" name="Notes Placeholder 2"/>
           <p:cNvSpPr>
             <a:spLocks noGrp="1"/>
           </p:cNvSpPr>
@@ -655,11 +717,51 @@
         </p:nvSpPr>
         <p:spPr/>
         <p:txBody>
-          <a:bodyPr>
-            <a:normAutofit/>
-          </a:bodyPr>
+          <a:bodyPr/>
           <a:lstStyle/>
           <a:p>
+            <a:pPr rtl="0"/>
+            <a:r>
+              <a:rPr lang="es-419"/>
+              <a:t>5.0 - ACL para la configuración IPv4	</a:t>
+            </a:r>
+          </a:p>
+          <a:p>
+            <a:pPr rtl="0"/>
+            <a:r>
+              <a:rPr lang="es-419"/>
+              <a:t>5.4 Configuración de ACL IPv4 extendidas</a:t>
+            </a:r>
+          </a:p>
+          <a:p>
+            <a:pPr rtl="0"/>
+            <a:r>
+              <a:rPr lang="es-419"/>
+              <a:t>5.4.3 — Protocolos y puertos</a:t>
+            </a:r>
+          </a:p>
+        </p:txBody>
+      </p:sp>
+      <p:sp>
+        <p:nvSpPr>
+          <p:cNvPr id="4" name="Slide Number Placeholder 3"/>
+          <p:cNvSpPr>
+            <a:spLocks noGrp="1"/>
+          </p:cNvSpPr>
+          <p:nvPr>
+            <p:ph type="sldNum" sz="quarter" idx="5"/>
+          </p:nvPr>
+        </p:nvSpPr>
+        <p:spPr/>
+        <p:txBody>
+          <a:bodyPr/>
+          <a:lstStyle/>
+          <a:p>
+            <a:pPr rtl="0"/>
+            <a:fld id="{5641018C-6CAF-B84E-B92C-ECB119457FBA}" type="slidenum">
+              <a:rPr/>
+              <a:t>11</a:t>
+            </a:fld>
             <a:endParaRPr/>
           </a:p>
         </p:txBody>
@@ -667,7 +769,7 @@
     </p:spTree>
     <p:extLst>
       <p:ext uri="{BB962C8B-B14F-4D97-AF65-F5344CB8AC3E}">
-        <p14:creationId xmlns:p14="http://schemas.microsoft.com/office/powerpoint/2010/main" val="252426500"/>
+        <p14:creationId xmlns:p14="http://schemas.microsoft.com/office/powerpoint/2010/main" val="2639068961"/>
       </p:ext>
     </p:extLst>
   </p:cSld>
@@ -738,7 +840,7 @@
             <a:pPr rtl="0"/>
             <a:r>
               <a:rPr lang="es-419"/>
-              <a:t>5.4.3 — Protocolos y puertos</a:t>
+              <a:t>5.4.4 — Ejemplos de configuración de protocolos y números de puerto</a:t>
             </a:r>
           </a:p>
         </p:txBody>
@@ -770,7 +872,7 @@
     </p:spTree>
     <p:extLst>
       <p:ext uri="{BB962C8B-B14F-4D97-AF65-F5344CB8AC3E}">
-        <p14:creationId xmlns:p14="http://schemas.microsoft.com/office/powerpoint/2010/main" val="2393749194"/>
+        <p14:creationId xmlns:p14="http://schemas.microsoft.com/office/powerpoint/2010/main" val="1198617590"/>
       </p:ext>
     </p:extLst>
   </p:cSld>
@@ -781,212 +883,6 @@
 </file>
 
 <file path=ppt/notesSlides/notesSlide13.xml><?xml version="1.0" encoding="utf-8"?>
-<p:notes xmlns:a="http://schemas.openxmlformats.org/drawingml/2006/main" xmlns:r="http://schemas.openxmlformats.org/officeDocument/2006/relationships" xmlns:p="http://schemas.openxmlformats.org/presentationml/2006/main">
-  <p:cSld>
-    <p:spTree>
-      <p:nvGrpSpPr>
-        <p:cNvPr id="1" name=""/>
-        <p:cNvGrpSpPr/>
-        <p:nvPr/>
-      </p:nvGrpSpPr>
-      <p:grpSpPr>
-        <a:xfrm>
-          <a:off x="0" y="0"/>
-          <a:ext cx="0" cy="0"/>
-          <a:chOff x="0" y="0"/>
-          <a:chExt cx="0" cy="0"/>
-        </a:xfrm>
-      </p:grpSpPr>
-      <p:sp>
-        <p:nvSpPr>
-          <p:cNvPr id="2" name="Slide Image Placeholder 1"/>
-          <p:cNvSpPr>
-            <a:spLocks noGrp="1" noRot="1" noChangeAspect="1"/>
-          </p:cNvSpPr>
-          <p:nvPr>
-            <p:ph type="sldImg"/>
-          </p:nvPr>
-        </p:nvSpPr>
-        <p:spPr/>
-      </p:sp>
-      <p:sp>
-        <p:nvSpPr>
-          <p:cNvPr id="3" name="Notes Placeholder 2"/>
-          <p:cNvSpPr>
-            <a:spLocks noGrp="1"/>
-          </p:cNvSpPr>
-          <p:nvPr>
-            <p:ph type="body" idx="1"/>
-          </p:nvPr>
-        </p:nvSpPr>
-        <p:spPr/>
-        <p:txBody>
-          <a:bodyPr/>
-          <a:lstStyle/>
-          <a:p>
-            <a:pPr rtl="0"/>
-            <a:r>
-              <a:rPr lang="es-419"/>
-              <a:t>5.0 - ACL para la configuración IPv4	</a:t>
-            </a:r>
-          </a:p>
-          <a:p>
-            <a:pPr rtl="0"/>
-            <a:r>
-              <a:rPr lang="es-419"/>
-              <a:t>5.4 Configuración de ACL IPv4 extendidas</a:t>
-            </a:r>
-          </a:p>
-          <a:p>
-            <a:pPr rtl="0"/>
-            <a:r>
-              <a:rPr lang="es-419"/>
-              <a:t>5.4.3 — Protocolos y puertos</a:t>
-            </a:r>
-          </a:p>
-        </p:txBody>
-      </p:sp>
-      <p:sp>
-        <p:nvSpPr>
-          <p:cNvPr id="4" name="Slide Number Placeholder 3"/>
-          <p:cNvSpPr>
-            <a:spLocks noGrp="1"/>
-          </p:cNvSpPr>
-          <p:nvPr>
-            <p:ph type="sldNum" sz="quarter" idx="5"/>
-          </p:nvPr>
-        </p:nvSpPr>
-        <p:spPr/>
-        <p:txBody>
-          <a:bodyPr/>
-          <a:lstStyle/>
-          <a:p>
-            <a:pPr rtl="0"/>
-            <a:fld id="{5641018C-6CAF-B84E-B92C-ECB119457FBA}" type="slidenum">
-              <a:rPr/>
-              <a:t>13</a:t>
-            </a:fld>
-            <a:endParaRPr/>
-          </a:p>
-        </p:txBody>
-      </p:sp>
-    </p:spTree>
-    <p:extLst>
-      <p:ext uri="{BB962C8B-B14F-4D97-AF65-F5344CB8AC3E}">
-        <p14:creationId xmlns:p14="http://schemas.microsoft.com/office/powerpoint/2010/main" val="2639068961"/>
-      </p:ext>
-    </p:extLst>
-  </p:cSld>
-  <p:clrMapOvr>
-    <a:masterClrMapping/>
-  </p:clrMapOvr>
-</p:notes>
-</file>
-
-<file path=ppt/notesSlides/notesSlide14.xml><?xml version="1.0" encoding="utf-8"?>
-<p:notes xmlns:a="http://schemas.openxmlformats.org/drawingml/2006/main" xmlns:r="http://schemas.openxmlformats.org/officeDocument/2006/relationships" xmlns:p="http://schemas.openxmlformats.org/presentationml/2006/main">
-  <p:cSld>
-    <p:spTree>
-      <p:nvGrpSpPr>
-        <p:cNvPr id="1" name=""/>
-        <p:cNvGrpSpPr/>
-        <p:nvPr/>
-      </p:nvGrpSpPr>
-      <p:grpSpPr>
-        <a:xfrm>
-          <a:off x="0" y="0"/>
-          <a:ext cx="0" cy="0"/>
-          <a:chOff x="0" y="0"/>
-          <a:chExt cx="0" cy="0"/>
-        </a:xfrm>
-      </p:grpSpPr>
-      <p:sp>
-        <p:nvSpPr>
-          <p:cNvPr id="2" name="Slide Image Placeholder 1"/>
-          <p:cNvSpPr>
-            <a:spLocks noGrp="1" noRot="1" noChangeAspect="1"/>
-          </p:cNvSpPr>
-          <p:nvPr>
-            <p:ph type="sldImg"/>
-          </p:nvPr>
-        </p:nvSpPr>
-        <p:spPr/>
-      </p:sp>
-      <p:sp>
-        <p:nvSpPr>
-          <p:cNvPr id="3" name="Notes Placeholder 2"/>
-          <p:cNvSpPr>
-            <a:spLocks noGrp="1"/>
-          </p:cNvSpPr>
-          <p:nvPr>
-            <p:ph type="body" idx="1"/>
-          </p:nvPr>
-        </p:nvSpPr>
-        <p:spPr/>
-        <p:txBody>
-          <a:bodyPr/>
-          <a:lstStyle/>
-          <a:p>
-            <a:pPr rtl="0"/>
-            <a:r>
-              <a:rPr lang="es-419"/>
-              <a:t>5.0 - ACL para la configuración IPv4	</a:t>
-            </a:r>
-          </a:p>
-          <a:p>
-            <a:pPr rtl="0"/>
-            <a:r>
-              <a:rPr lang="es-419"/>
-              <a:t>5.4 Configuración de ACL IPv4 extendidas</a:t>
-            </a:r>
-          </a:p>
-          <a:p>
-            <a:pPr rtl="0"/>
-            <a:r>
-              <a:rPr lang="es-419"/>
-              <a:t>5.4.4 — Ejemplos de configuración de protocolos y números de puerto</a:t>
-            </a:r>
-          </a:p>
-        </p:txBody>
-      </p:sp>
-      <p:sp>
-        <p:nvSpPr>
-          <p:cNvPr id="4" name="Slide Number Placeholder 3"/>
-          <p:cNvSpPr>
-            <a:spLocks noGrp="1"/>
-          </p:cNvSpPr>
-          <p:nvPr>
-            <p:ph type="sldNum" sz="quarter" idx="5"/>
-          </p:nvPr>
-        </p:nvSpPr>
-        <p:spPr/>
-        <p:txBody>
-          <a:bodyPr/>
-          <a:lstStyle/>
-          <a:p>
-            <a:pPr rtl="0"/>
-            <a:fld id="{5641018C-6CAF-B84E-B92C-ECB119457FBA}" type="slidenum">
-              <a:rPr/>
-              <a:t>14</a:t>
-            </a:fld>
-            <a:endParaRPr/>
-          </a:p>
-        </p:txBody>
-      </p:sp>
-    </p:spTree>
-    <p:extLst>
-      <p:ext uri="{BB962C8B-B14F-4D97-AF65-F5344CB8AC3E}">
-        <p14:creationId xmlns:p14="http://schemas.microsoft.com/office/powerpoint/2010/main" val="1198617590"/>
-      </p:ext>
-    </p:extLst>
-  </p:cSld>
-  <p:clrMapOvr>
-    <a:masterClrMapping/>
-  </p:clrMapOvr>
-</p:notes>
-</file>
-
-<file path=ppt/notesSlides/notesSlide15.xml><?xml version="1.0" encoding="utf-8"?>
 <p:notes xmlns:a="http://schemas.openxmlformats.org/drawingml/2006/main" xmlns:r="http://schemas.openxmlformats.org/officeDocument/2006/relationships" xmlns:p="http://schemas.openxmlformats.org/presentationml/2006/main">
   <p:cSld>
     <p:spTree>
@@ -1032,7 +928,7 @@
 </p:notes>
 </file>
 
-<file path=ppt/notesSlides/notesSlide16.xml><?xml version="1.0" encoding="utf-8"?>
+<file path=ppt/notesSlides/notesSlide14.xml><?xml version="1.0" encoding="utf-8"?>
 <p:notes xmlns:a="http://schemas.openxmlformats.org/drawingml/2006/main" xmlns:r="http://schemas.openxmlformats.org/officeDocument/2006/relationships" xmlns:p="http://schemas.openxmlformats.org/presentationml/2006/main">
   <p:cSld>
     <p:spTree>
@@ -1654,6 +1550,11 @@
         </p:txBody>
       </p:sp>
     </p:spTree>
+    <p:extLst>
+      <p:ext uri="{BB962C8B-B14F-4D97-AF65-F5344CB8AC3E}">
+        <p14:creationId xmlns:p14="http://schemas.microsoft.com/office/powerpoint/2010/main" val="252426500"/>
+      </p:ext>
+    </p:extLst>
   </p:cSld>
   <p:clrMapOvr>
     <a:masterClrMapping/>
@@ -1842,7 +1743,7 @@
           <a:p>
             <a:fld id="{5E75A0DC-66C6-4CEC-A5EB-F8C97CEC3796}" type="datetimeFigureOut">
               <a:rPr lang="es-MX" smtClean="0"/>
-              <a:t>24/04/2023</a:t>
+              <a:t>15/04/2025</a:t>
             </a:fld>
             <a:endParaRPr lang="es-MX" dirty="0"/>
           </a:p>
@@ -1884,7 +1785,7 @@
           <a:p>
             <a:fld id="{C077EE1E-7A06-4E7F-9AFB-189FC69B7B0C}" type="slidenum">
               <a:rPr lang="es-MX" smtClean="0"/>
-              <a:t>‹Nº›</a:t>
+              <a:t>‹#›</a:t>
             </a:fld>
             <a:endParaRPr lang="es-MX" dirty="0"/>
           </a:p>
@@ -2012,7 +1913,7 @@
           <a:p>
             <a:fld id="{5E75A0DC-66C6-4CEC-A5EB-F8C97CEC3796}" type="datetimeFigureOut">
               <a:rPr lang="es-MX" smtClean="0"/>
-              <a:t>24/04/2023</a:t>
+              <a:t>15/04/2025</a:t>
             </a:fld>
             <a:endParaRPr lang="es-MX" dirty="0"/>
           </a:p>
@@ -2054,7 +1955,7 @@
           <a:p>
             <a:fld id="{C077EE1E-7A06-4E7F-9AFB-189FC69B7B0C}" type="slidenum">
               <a:rPr lang="es-MX" smtClean="0"/>
-              <a:t>‹Nº›</a:t>
+              <a:t>‹#›</a:t>
             </a:fld>
             <a:endParaRPr lang="es-MX" dirty="0"/>
           </a:p>
@@ -2192,7 +2093,7 @@
           <a:p>
             <a:fld id="{5E75A0DC-66C6-4CEC-A5EB-F8C97CEC3796}" type="datetimeFigureOut">
               <a:rPr lang="es-MX" smtClean="0"/>
-              <a:t>24/04/2023</a:t>
+              <a:t>15/04/2025</a:t>
             </a:fld>
             <a:endParaRPr lang="es-MX" dirty="0"/>
           </a:p>
@@ -2234,7 +2135,7 @@
           <a:p>
             <a:fld id="{C077EE1E-7A06-4E7F-9AFB-189FC69B7B0C}" type="slidenum">
               <a:rPr lang="es-MX" smtClean="0"/>
-              <a:t>‹Nº›</a:t>
+              <a:t>‹#›</a:t>
             </a:fld>
             <a:endParaRPr lang="es-MX" dirty="0"/>
           </a:p>
@@ -2406,7 +2307,7 @@
         <p:fade/>
       </p:transition>
     </mc:Choice>
-    <mc:Fallback xmlns:c="http://schemas.openxmlformats.org/drawingml/2006/chart" xmlns:c15="http://schemas.microsoft.com/office/drawing/2012/chart" xmlns="">
+    <mc:Fallback xmlns="" xmlns:c15="http://schemas.microsoft.com/office/drawing/2012/chart" xmlns:c="http://schemas.openxmlformats.org/drawingml/2006/chart">
       <p:transition xmlns:p14="http://schemas.microsoft.com/office/powerpoint/2010/main" spd="med">
         <p:fade/>
       </p:transition>
@@ -2524,7 +2425,7 @@
           <a:p>
             <a:fld id="{5E75A0DC-66C6-4CEC-A5EB-F8C97CEC3796}" type="datetimeFigureOut">
               <a:rPr lang="es-MX" smtClean="0"/>
-              <a:t>24/04/2023</a:t>
+              <a:t>15/04/2025</a:t>
             </a:fld>
             <a:endParaRPr lang="es-MX" dirty="0"/>
           </a:p>
@@ -2566,7 +2467,7 @@
           <a:p>
             <a:fld id="{C077EE1E-7A06-4E7F-9AFB-189FC69B7B0C}" type="slidenum">
               <a:rPr lang="es-MX" smtClean="0"/>
-              <a:t>‹Nº›</a:t>
+              <a:t>‹#›</a:t>
             </a:fld>
             <a:endParaRPr lang="es-MX" dirty="0"/>
           </a:p>
@@ -2770,7 +2671,7 @@
           <a:p>
             <a:fld id="{5E75A0DC-66C6-4CEC-A5EB-F8C97CEC3796}" type="datetimeFigureOut">
               <a:rPr lang="es-MX" smtClean="0"/>
-              <a:t>24/04/2023</a:t>
+              <a:t>15/04/2025</a:t>
             </a:fld>
             <a:endParaRPr lang="es-MX" dirty="0"/>
           </a:p>
@@ -2812,7 +2713,7 @@
           <a:p>
             <a:fld id="{C077EE1E-7A06-4E7F-9AFB-189FC69B7B0C}" type="slidenum">
               <a:rPr lang="es-MX" smtClean="0"/>
-              <a:t>‹Nº›</a:t>
+              <a:t>‹#›</a:t>
             </a:fld>
             <a:endParaRPr lang="es-MX" dirty="0"/>
           </a:p>
@@ -3058,7 +2959,7 @@
           <a:p>
             <a:fld id="{5E75A0DC-66C6-4CEC-A5EB-F8C97CEC3796}" type="datetimeFigureOut">
               <a:rPr lang="es-MX" smtClean="0"/>
-              <a:t>24/04/2023</a:t>
+              <a:t>15/04/2025</a:t>
             </a:fld>
             <a:endParaRPr lang="es-MX" dirty="0"/>
           </a:p>
@@ -3100,7 +3001,7 @@
           <a:p>
             <a:fld id="{C077EE1E-7A06-4E7F-9AFB-189FC69B7B0C}" type="slidenum">
               <a:rPr lang="es-MX" smtClean="0"/>
-              <a:t>‹Nº›</a:t>
+              <a:t>‹#›</a:t>
             </a:fld>
             <a:endParaRPr lang="es-MX" dirty="0"/>
           </a:p>
@@ -3480,7 +3381,7 @@
           <a:p>
             <a:fld id="{5E75A0DC-66C6-4CEC-A5EB-F8C97CEC3796}" type="datetimeFigureOut">
               <a:rPr lang="es-MX" smtClean="0"/>
-              <a:t>24/04/2023</a:t>
+              <a:t>15/04/2025</a:t>
             </a:fld>
             <a:endParaRPr lang="es-MX" dirty="0"/>
           </a:p>
@@ -3522,7 +3423,7 @@
           <a:p>
             <a:fld id="{C077EE1E-7A06-4E7F-9AFB-189FC69B7B0C}" type="slidenum">
               <a:rPr lang="es-MX" smtClean="0"/>
-              <a:t>‹Nº›</a:t>
+              <a:t>‹#›</a:t>
             </a:fld>
             <a:endParaRPr lang="es-MX" dirty="0"/>
           </a:p>
@@ -3598,7 +3499,7 @@
           <a:p>
             <a:fld id="{5E75A0DC-66C6-4CEC-A5EB-F8C97CEC3796}" type="datetimeFigureOut">
               <a:rPr lang="es-MX" smtClean="0"/>
-              <a:t>24/04/2023</a:t>
+              <a:t>15/04/2025</a:t>
             </a:fld>
             <a:endParaRPr lang="es-MX" dirty="0"/>
           </a:p>
@@ -3640,7 +3541,7 @@
           <a:p>
             <a:fld id="{C077EE1E-7A06-4E7F-9AFB-189FC69B7B0C}" type="slidenum">
               <a:rPr lang="es-MX" smtClean="0"/>
-              <a:t>‹Nº›</a:t>
+              <a:t>‹#›</a:t>
             </a:fld>
             <a:endParaRPr lang="es-MX" dirty="0"/>
           </a:p>
@@ -3693,7 +3594,7 @@
           <a:p>
             <a:fld id="{5E75A0DC-66C6-4CEC-A5EB-F8C97CEC3796}" type="datetimeFigureOut">
               <a:rPr lang="es-MX" smtClean="0"/>
-              <a:t>24/04/2023</a:t>
+              <a:t>15/04/2025</a:t>
             </a:fld>
             <a:endParaRPr lang="es-MX" dirty="0"/>
           </a:p>
@@ -3735,7 +3636,7 @@
           <a:p>
             <a:fld id="{C077EE1E-7A06-4E7F-9AFB-189FC69B7B0C}" type="slidenum">
               <a:rPr lang="es-MX" smtClean="0"/>
-              <a:t>‹Nº›</a:t>
+              <a:t>‹#›</a:t>
             </a:fld>
             <a:endParaRPr lang="es-MX" dirty="0"/>
           </a:p>
@@ -3970,7 +3871,7 @@
           <a:p>
             <a:fld id="{5E75A0DC-66C6-4CEC-A5EB-F8C97CEC3796}" type="datetimeFigureOut">
               <a:rPr lang="es-MX" smtClean="0"/>
-              <a:t>24/04/2023</a:t>
+              <a:t>15/04/2025</a:t>
             </a:fld>
             <a:endParaRPr lang="es-MX" dirty="0"/>
           </a:p>
@@ -4012,7 +3913,7 @@
           <a:p>
             <a:fld id="{C077EE1E-7A06-4E7F-9AFB-189FC69B7B0C}" type="slidenum">
               <a:rPr lang="es-MX" smtClean="0"/>
-              <a:t>‹Nº›</a:t>
+              <a:t>‹#›</a:t>
             </a:fld>
             <a:endParaRPr lang="es-MX" dirty="0"/>
           </a:p>
@@ -4223,7 +4124,7 @@
           <a:p>
             <a:fld id="{5E75A0DC-66C6-4CEC-A5EB-F8C97CEC3796}" type="datetimeFigureOut">
               <a:rPr lang="es-MX" smtClean="0"/>
-              <a:t>24/04/2023</a:t>
+              <a:t>15/04/2025</a:t>
             </a:fld>
             <a:endParaRPr lang="es-MX" dirty="0"/>
           </a:p>
@@ -4265,7 +4166,7 @@
           <a:p>
             <a:fld id="{C077EE1E-7A06-4E7F-9AFB-189FC69B7B0C}" type="slidenum">
               <a:rPr lang="es-MX" smtClean="0"/>
-              <a:t>‹Nº›</a:t>
+              <a:t>‹#›</a:t>
             </a:fld>
             <a:endParaRPr lang="es-MX" dirty="0"/>
           </a:p>
@@ -4436,7 +4337,7 @@
           <a:p>
             <a:fld id="{5E75A0DC-66C6-4CEC-A5EB-F8C97CEC3796}" type="datetimeFigureOut">
               <a:rPr lang="es-MX" smtClean="0"/>
-              <a:t>24/04/2023</a:t>
+              <a:t>15/04/2025</a:t>
             </a:fld>
             <a:endParaRPr lang="es-MX" dirty="0"/>
           </a:p>
@@ -4514,7 +4415,7 @@
           <a:p>
             <a:fld id="{C077EE1E-7A06-4E7F-9AFB-189FC69B7B0C}" type="slidenum">
               <a:rPr lang="es-MX" smtClean="0"/>
-              <a:t>‹Nº›</a:t>
+              <a:t>‹#›</a:t>
             </a:fld>
             <a:endParaRPr lang="es-MX" dirty="0"/>
           </a:p>
@@ -5018,1605 +4919,6 @@
       </p:grpSpPr>
       <p:sp>
         <p:nvSpPr>
-          <p:cNvPr id="3" name="object 3"/>
-          <p:cNvSpPr txBox="1"/>
-          <p:nvPr/>
-        </p:nvSpPr>
-        <p:spPr>
-          <a:xfrm>
-            <a:off x="899592" y="1844824"/>
-            <a:ext cx="7704856" cy="4004301"/>
-          </a:xfrm>
-          <a:prstGeom prst="rect">
-            <a:avLst/>
-          </a:prstGeom>
-        </p:spPr>
-        <p:txBody>
-          <a:bodyPr vert="horz" wrap="square" lIns="0" tIns="0" rIns="0" bIns="0" rtlCol="0">
-            <a:spAutoFit/>
-          </a:bodyPr>
-          <a:lstStyle/>
-          <a:p>
-            <a:pPr marL="123825" marR="3810" algn="just">
-              <a:lnSpc>
-                <a:spcPct val="150000"/>
-              </a:lnSpc>
-            </a:pPr>
-            <a:r>
-              <a:rPr lang="es-ES" spc="-4" dirty="0">
-                <a:cs typeface="Arial Narrow"/>
-              </a:rPr>
-              <a:t>1. Identificar la fuente/origen (</a:t>
-            </a:r>
-            <a:r>
-              <a:rPr lang="es-ES" b="1" spc="-4" dirty="0">
-                <a:cs typeface="Arial Narrow"/>
-              </a:rPr>
-              <a:t>tráfico fuente</a:t>
-            </a:r>
-            <a:r>
-              <a:rPr lang="es-ES" spc="-4" dirty="0">
-                <a:cs typeface="Arial Narrow"/>
-              </a:rPr>
-              <a:t>)</a:t>
-            </a:r>
-          </a:p>
-          <a:p>
-            <a:pPr marL="123825" marR="3810" algn="just">
-              <a:lnSpc>
-                <a:spcPct val="150000"/>
-              </a:lnSpc>
-            </a:pPr>
-            <a:r>
-              <a:rPr lang="es-ES" spc="-4" dirty="0">
-                <a:cs typeface="Arial Narrow"/>
-              </a:rPr>
-              <a:t>2. Trazar el </a:t>
-            </a:r>
-            <a:r>
-              <a:rPr lang="es-ES" b="1" spc="-4" dirty="0">
-                <a:cs typeface="Arial Narrow"/>
-              </a:rPr>
-              <a:t>trayecto</a:t>
-            </a:r>
-            <a:r>
-              <a:rPr lang="es-ES" spc="-4" dirty="0">
-                <a:cs typeface="Arial Narrow"/>
-              </a:rPr>
-              <a:t> del </a:t>
-            </a:r>
-            <a:r>
-              <a:rPr lang="es-ES" b="1" spc="-4" dirty="0">
-                <a:cs typeface="Arial Narrow"/>
-              </a:rPr>
-              <a:t>tráfico NO permitido</a:t>
-            </a:r>
-            <a:r>
-              <a:rPr lang="es-ES" spc="-4" dirty="0">
-                <a:cs typeface="Arial Narrow"/>
-              </a:rPr>
-              <a:t>. </a:t>
-            </a:r>
-          </a:p>
-          <a:p>
-            <a:pPr marL="123825" marR="3810" algn="just">
-              <a:lnSpc>
-                <a:spcPct val="150000"/>
-              </a:lnSpc>
-            </a:pPr>
-            <a:r>
-              <a:rPr lang="es-ES" spc="-4" dirty="0">
-                <a:cs typeface="Arial Narrow"/>
-              </a:rPr>
-              <a:t>3. Trazar el </a:t>
-            </a:r>
-            <a:r>
-              <a:rPr lang="es-ES" b="1" spc="-4" dirty="0">
-                <a:cs typeface="Arial Narrow"/>
-              </a:rPr>
-              <a:t>trayecto </a:t>
-            </a:r>
-            <a:r>
-              <a:rPr lang="es-ES" spc="-4" dirty="0">
-                <a:cs typeface="Arial Narrow"/>
-              </a:rPr>
-              <a:t>del </a:t>
-            </a:r>
-            <a:r>
-              <a:rPr lang="es-ES" b="1" spc="-4" dirty="0">
-                <a:cs typeface="Arial Narrow"/>
-              </a:rPr>
-              <a:t>tráfico permitido</a:t>
-            </a:r>
-            <a:r>
-              <a:rPr lang="es-ES" spc="-4" dirty="0">
-                <a:cs typeface="Arial Narrow"/>
-              </a:rPr>
-              <a:t>. </a:t>
-            </a:r>
-          </a:p>
-          <a:p>
-            <a:pPr marL="123825" marR="3810" algn="just">
-              <a:lnSpc>
-                <a:spcPct val="150000"/>
-              </a:lnSpc>
-            </a:pPr>
-            <a:r>
-              <a:rPr lang="es-ES" spc="-4" dirty="0">
-                <a:cs typeface="Arial Narrow"/>
-              </a:rPr>
-              <a:t>4. Identificar el </a:t>
-            </a:r>
-            <a:r>
-              <a:rPr lang="es-ES" b="1" spc="-4" dirty="0" err="1">
-                <a:cs typeface="Arial Narrow"/>
-              </a:rPr>
-              <a:t>router</a:t>
-            </a:r>
-            <a:r>
-              <a:rPr lang="es-ES" spc="-4" dirty="0">
-                <a:cs typeface="Arial Narrow"/>
-              </a:rPr>
-              <a:t> donde se instalará la lista de control de acceso.</a:t>
-            </a:r>
-          </a:p>
-          <a:p>
-            <a:pPr marL="123825" marR="3810" algn="just">
-              <a:lnSpc>
-                <a:spcPct val="150000"/>
-              </a:lnSpc>
-            </a:pPr>
-            <a:r>
-              <a:rPr lang="es-ES" spc="-4" dirty="0">
-                <a:cs typeface="Arial Narrow"/>
-              </a:rPr>
-              <a:t>5. Identificar la </a:t>
-            </a:r>
-            <a:r>
-              <a:rPr lang="es-ES" b="1" spc="-4" dirty="0">
-                <a:cs typeface="Arial Narrow"/>
-              </a:rPr>
-              <a:t>interfaz</a:t>
-            </a:r>
-            <a:r>
-              <a:rPr lang="es-ES" spc="-4" dirty="0">
-                <a:cs typeface="Arial Narrow"/>
-              </a:rPr>
-              <a:t> donde se va a asociar la lista de control de acceso.</a:t>
-            </a:r>
-          </a:p>
-          <a:p>
-            <a:pPr marL="123825" marR="3810" algn="just">
-              <a:lnSpc>
-                <a:spcPct val="150000"/>
-              </a:lnSpc>
-              <a:spcAft>
-                <a:spcPts val="1200"/>
-              </a:spcAft>
-            </a:pPr>
-            <a:r>
-              <a:rPr lang="es-ES" spc="-4" dirty="0">
-                <a:cs typeface="Arial Narrow"/>
-              </a:rPr>
-              <a:t>6. Escribir la ACL, instalarla y probarla.</a:t>
-            </a:r>
-          </a:p>
-          <a:p>
-            <a:pPr marL="123825" marR="3810" algn="just">
-              <a:lnSpc>
-                <a:spcPct val="150000"/>
-              </a:lnSpc>
-              <a:spcAft>
-                <a:spcPts val="1200"/>
-              </a:spcAft>
-            </a:pPr>
-            <a:r>
-              <a:rPr lang="es-ES" b="1" spc="-4" dirty="0">
-                <a:cs typeface="Arial Narrow"/>
-              </a:rPr>
-              <a:t>NOTA: </a:t>
-            </a:r>
-            <a:r>
-              <a:rPr lang="es-ES" spc="-4" dirty="0">
-                <a:cs typeface="Arial Narrow"/>
-              </a:rPr>
-              <a:t>Realizar pruebas de conectividad antes y después de instalar una ACL</a:t>
-            </a:r>
-          </a:p>
-          <a:p>
-            <a:pPr marL="123825" marR="3810" algn="just">
-              <a:lnSpc>
-                <a:spcPct val="150000"/>
-              </a:lnSpc>
-            </a:pPr>
-            <a:r>
-              <a:rPr lang="es-ES" b="1" spc="-4" dirty="0">
-                <a:solidFill>
-                  <a:schemeClr val="accent6">
-                    <a:lumMod val="75000"/>
-                  </a:schemeClr>
-                </a:solidFill>
-                <a:cs typeface="Arial Narrow"/>
-              </a:rPr>
-              <a:t>REGLA: LAS LISTAS DE CONTROL DE ACCESO ESTÁNDAR SE DEBEN INSTALAR LO MAS CERCA DEL DESTINO.</a:t>
-            </a:r>
-          </a:p>
-        </p:txBody>
-      </p:sp>
-      <p:sp>
-        <p:nvSpPr>
-          <p:cNvPr id="8" name="object 2">
-            <a:extLst>
-              <a:ext uri="{FF2B5EF4-FFF2-40B4-BE49-F238E27FC236}">
-                <a16:creationId xmlns:a16="http://schemas.microsoft.com/office/drawing/2014/main" id="{257E321D-AB3B-4F6E-89EC-D5AD1090E97F}"/>
-              </a:ext>
-            </a:extLst>
-          </p:cNvPr>
-          <p:cNvSpPr txBox="1">
-            <a:spLocks/>
-          </p:cNvSpPr>
-          <p:nvPr/>
-        </p:nvSpPr>
-        <p:spPr>
-          <a:xfrm>
-            <a:off x="647564" y="404664"/>
-            <a:ext cx="7848872" cy="984885"/>
-          </a:xfrm>
-          <a:prstGeom prst="rect">
-            <a:avLst/>
-          </a:prstGeom>
-        </p:spPr>
-        <p:txBody>
-          <a:bodyPr vert="horz" wrap="square" lIns="0" tIns="0" rIns="0" bIns="0" rtlCol="0" anchor="ctr">
-            <a:spAutoFit/>
-          </a:bodyPr>
-          <a:lstStyle>
-            <a:lvl1pPr algn="ctr" defTabSz="914400" rtl="0" eaLnBrk="1" latinLnBrk="0" hangingPunct="1">
-              <a:spcBef>
-                <a:spcPct val="0"/>
-              </a:spcBef>
-              <a:buNone/>
-              <a:defRPr sz="2700" b="1" i="0" kern="1200">
-                <a:solidFill>
-                  <a:schemeClr val="bg1"/>
-                </a:solidFill>
-                <a:latin typeface="Arial Narrow"/>
-                <a:ea typeface="+mj-ea"/>
-                <a:cs typeface="Arial Narrow"/>
-              </a:defRPr>
-            </a:lvl1pPr>
-          </a:lstStyle>
-          <a:p>
-            <a:pPr marL="92075"/>
-            <a:r>
-              <a:rPr lang="es-MX" sz="3200" spc="-15" dirty="0">
-                <a:solidFill>
-                  <a:schemeClr val="accent4">
-                    <a:lumMod val="50000"/>
-                  </a:schemeClr>
-                </a:solidFill>
-                <a:latin typeface="Dom Casual"/>
-              </a:rPr>
-              <a:t>Mejores prácticas para el diseño de listas de control de acceso “Estándar”</a:t>
-            </a:r>
-          </a:p>
-        </p:txBody>
-      </p:sp>
-    </p:spTree>
-    <p:extLst>
-      <p:ext uri="{BB962C8B-B14F-4D97-AF65-F5344CB8AC3E}">
-        <p14:creationId xmlns:p14="http://schemas.microsoft.com/office/powerpoint/2010/main" val="3280680632"/>
-      </p:ext>
-    </p:extLst>
-  </p:cSld>
-  <p:clrMapOvr>
-    <a:masterClrMapping/>
-  </p:clrMapOvr>
-</p:sld>
-</file>
-
-<file path=ppt/slides/slide11.xml><?xml version="1.0" encoding="utf-8"?>
-<p:sld xmlns:a="http://schemas.openxmlformats.org/drawingml/2006/main" xmlns:r="http://schemas.openxmlformats.org/officeDocument/2006/relationships" xmlns:p="http://schemas.openxmlformats.org/presentationml/2006/main">
-  <p:cSld>
-    <p:spTree>
-      <p:nvGrpSpPr>
-        <p:cNvPr id="1" name=""/>
-        <p:cNvGrpSpPr/>
-        <p:nvPr/>
-      </p:nvGrpSpPr>
-      <p:grpSpPr>
-        <a:xfrm>
-          <a:off x="0" y="0"/>
-          <a:ext cx="0" cy="0"/>
-          <a:chOff x="0" y="0"/>
-          <a:chExt cx="0" cy="0"/>
-        </a:xfrm>
-      </p:grpSpPr>
-      <p:sp>
-        <p:nvSpPr>
-          <p:cNvPr id="2" name="object 2"/>
-          <p:cNvSpPr txBox="1"/>
-          <p:nvPr/>
-        </p:nvSpPr>
-        <p:spPr>
-          <a:xfrm>
-            <a:off x="1657350" y="1714501"/>
-            <a:ext cx="5657850" cy="646331"/>
-          </a:xfrm>
-          <a:prstGeom prst="rect">
-            <a:avLst/>
-          </a:prstGeom>
-          <a:solidFill>
-            <a:srgbClr val="FFFF00"/>
-          </a:solidFill>
-        </p:spPr>
-        <p:txBody>
-          <a:bodyPr vert="horz" wrap="square" lIns="0" tIns="0" rIns="0" bIns="0" rtlCol="0">
-            <a:spAutoFit/>
-          </a:bodyPr>
-          <a:lstStyle/>
-          <a:p>
-            <a:pPr marL="68580"/>
-            <a:r>
-              <a:rPr sz="2100" b="1" spc="-11" dirty="0">
-                <a:latin typeface="Arial Narrow"/>
-                <a:cs typeface="Arial Narrow"/>
-              </a:rPr>
-              <a:t>Cre</a:t>
-            </a:r>
-            <a:r>
-              <a:rPr sz="2100" b="1" spc="-19" dirty="0">
-                <a:latin typeface="Arial Narrow"/>
-                <a:cs typeface="Arial Narrow"/>
-              </a:rPr>
-              <a:t>a</a:t>
-            </a:r>
-            <a:r>
-              <a:rPr sz="2100" b="1" spc="-15" dirty="0">
-                <a:latin typeface="Arial Narrow"/>
-                <a:cs typeface="Arial Narrow"/>
-              </a:rPr>
-              <a:t>ció</a:t>
-            </a:r>
-            <a:r>
-              <a:rPr sz="2100" b="1" spc="-11" dirty="0">
-                <a:latin typeface="Arial Narrow"/>
-                <a:cs typeface="Arial Narrow"/>
-              </a:rPr>
-              <a:t>n</a:t>
-            </a:r>
-            <a:r>
-              <a:rPr sz="2100" b="1" spc="71" dirty="0">
-                <a:latin typeface="Arial Narrow"/>
-                <a:cs typeface="Arial Narrow"/>
-              </a:rPr>
-              <a:t> </a:t>
-            </a:r>
-            <a:r>
-              <a:rPr sz="2100" b="1" spc="-11" dirty="0">
-                <a:latin typeface="Arial Narrow"/>
-                <a:cs typeface="Arial Narrow"/>
-              </a:rPr>
-              <a:t>de</a:t>
-            </a:r>
-            <a:r>
-              <a:rPr sz="2100" b="1" spc="68" dirty="0">
-                <a:latin typeface="Arial Narrow"/>
-                <a:cs typeface="Arial Narrow"/>
-              </a:rPr>
-              <a:t> </a:t>
-            </a:r>
-            <a:r>
-              <a:rPr sz="2100" b="1" spc="-15" dirty="0">
-                <a:latin typeface="Arial Narrow"/>
-                <a:cs typeface="Arial Narrow"/>
-              </a:rPr>
-              <a:t>estatut</a:t>
-            </a:r>
-            <a:r>
-              <a:rPr sz="2100" b="1" spc="-8" dirty="0">
-                <a:latin typeface="Arial Narrow"/>
-                <a:cs typeface="Arial Narrow"/>
-              </a:rPr>
-              <a:t>o</a:t>
-            </a:r>
-            <a:r>
-              <a:rPr sz="2100" b="1" spc="-11" dirty="0">
-                <a:latin typeface="Arial Narrow"/>
-                <a:cs typeface="Arial Narrow"/>
-              </a:rPr>
-              <a:t>s</a:t>
-            </a:r>
-            <a:r>
-              <a:rPr sz="2100" b="1" spc="60" dirty="0">
-                <a:latin typeface="Arial Narrow"/>
-                <a:cs typeface="Arial Narrow"/>
-              </a:rPr>
-              <a:t> </a:t>
-            </a:r>
-            <a:r>
-              <a:rPr sz="2100" b="1" spc="-11" dirty="0">
-                <a:latin typeface="Arial Narrow"/>
-                <a:cs typeface="Arial Narrow"/>
-              </a:rPr>
-              <a:t>de</a:t>
-            </a:r>
-            <a:r>
-              <a:rPr sz="2100" b="1" spc="68" dirty="0">
-                <a:latin typeface="Arial Narrow"/>
-                <a:cs typeface="Arial Narrow"/>
-              </a:rPr>
-              <a:t> </a:t>
-            </a:r>
-            <a:r>
-              <a:rPr sz="2100" b="1" spc="-8" dirty="0">
-                <a:latin typeface="Arial Narrow"/>
-                <a:cs typeface="Arial Narrow"/>
-              </a:rPr>
-              <a:t>listas</a:t>
-            </a:r>
-            <a:r>
-              <a:rPr sz="2100" b="1" spc="64" dirty="0">
-                <a:latin typeface="Arial Narrow"/>
-                <a:cs typeface="Arial Narrow"/>
-              </a:rPr>
-              <a:t> </a:t>
-            </a:r>
-            <a:r>
-              <a:rPr sz="2100" b="1" spc="-11" dirty="0">
-                <a:latin typeface="Arial Narrow"/>
-                <a:cs typeface="Arial Narrow"/>
-              </a:rPr>
-              <a:t>de</a:t>
-            </a:r>
-            <a:r>
-              <a:rPr sz="2100" b="1" spc="68" dirty="0">
-                <a:latin typeface="Arial Narrow"/>
-                <a:cs typeface="Arial Narrow"/>
-              </a:rPr>
-              <a:t> </a:t>
-            </a:r>
-            <a:r>
-              <a:rPr sz="2100" b="1" spc="-15" dirty="0">
-                <a:latin typeface="Arial Narrow"/>
-                <a:cs typeface="Arial Narrow"/>
-              </a:rPr>
-              <a:t>contro</a:t>
-            </a:r>
-            <a:r>
-              <a:rPr sz="2100" b="1" spc="-8" dirty="0">
-                <a:latin typeface="Arial Narrow"/>
-                <a:cs typeface="Arial Narrow"/>
-              </a:rPr>
-              <a:t>l</a:t>
-            </a:r>
-            <a:r>
-              <a:rPr sz="2100" b="1" spc="75" dirty="0">
-                <a:latin typeface="Arial Narrow"/>
-                <a:cs typeface="Arial Narrow"/>
-              </a:rPr>
-              <a:t> </a:t>
-            </a:r>
-            <a:r>
-              <a:rPr sz="2100" b="1" spc="-19" dirty="0">
-                <a:latin typeface="Arial Narrow"/>
-                <a:cs typeface="Arial Narrow"/>
-              </a:rPr>
-              <a:t>d</a:t>
-            </a:r>
-            <a:r>
-              <a:rPr sz="2100" b="1" spc="-11" dirty="0">
-                <a:latin typeface="Arial Narrow"/>
-                <a:cs typeface="Arial Narrow"/>
-              </a:rPr>
-              <a:t>e</a:t>
-            </a:r>
-            <a:r>
-              <a:rPr sz="2100" b="1" spc="68" dirty="0">
-                <a:latin typeface="Arial Narrow"/>
-                <a:cs typeface="Arial Narrow"/>
-              </a:rPr>
-              <a:t> </a:t>
-            </a:r>
-            <a:r>
-              <a:rPr sz="2100" b="1" spc="-15" dirty="0">
-                <a:latin typeface="Arial Narrow"/>
-                <a:cs typeface="Arial Narrow"/>
-              </a:rPr>
-              <a:t>acceso</a:t>
-            </a:r>
-            <a:endParaRPr sz="2100">
-              <a:latin typeface="Arial Narrow"/>
-              <a:cs typeface="Arial Narrow"/>
-            </a:endParaRPr>
-          </a:p>
-          <a:p>
-            <a:pPr marL="68580"/>
-            <a:r>
-              <a:rPr sz="2100" b="1" spc="-15" dirty="0">
-                <a:latin typeface="Arial Narrow"/>
-                <a:cs typeface="Arial Narrow"/>
-              </a:rPr>
-              <a:t>extendida</a:t>
-            </a:r>
-            <a:r>
-              <a:rPr sz="2100" b="1" spc="-23" dirty="0">
-                <a:latin typeface="Arial Narrow"/>
-                <a:cs typeface="Arial Narrow"/>
-              </a:rPr>
-              <a:t>s</a:t>
-            </a:r>
-            <a:r>
-              <a:rPr sz="2100" b="1" spc="-8" dirty="0">
-                <a:latin typeface="Arial Narrow"/>
-                <a:cs typeface="Arial Narrow"/>
-              </a:rPr>
-              <a:t>:</a:t>
-            </a:r>
-            <a:endParaRPr sz="2100">
-              <a:latin typeface="Arial Narrow"/>
-              <a:cs typeface="Arial Narrow"/>
-            </a:endParaRPr>
-          </a:p>
-        </p:txBody>
-      </p:sp>
-      <p:sp>
-        <p:nvSpPr>
-          <p:cNvPr id="3" name="object 3"/>
-          <p:cNvSpPr txBox="1"/>
-          <p:nvPr/>
-        </p:nvSpPr>
-        <p:spPr>
-          <a:xfrm>
-            <a:off x="1716596" y="2577487"/>
-            <a:ext cx="5653563" cy="2702022"/>
-          </a:xfrm>
-          <a:prstGeom prst="rect">
-            <a:avLst/>
-          </a:prstGeom>
-        </p:spPr>
-        <p:txBody>
-          <a:bodyPr vert="horz" wrap="square" lIns="0" tIns="0" rIns="0" bIns="0" rtlCol="0">
-            <a:spAutoFit/>
-          </a:bodyPr>
-          <a:lstStyle/>
-          <a:p>
-            <a:pPr marL="123825" marR="3810" algn="just"/>
-            <a:r>
-              <a:rPr b="1" spc="-4" dirty="0">
-                <a:latin typeface="Arial Narrow"/>
-                <a:cs typeface="Arial Narrow"/>
-              </a:rPr>
-              <a:t>a</a:t>
-            </a:r>
-            <a:r>
-              <a:rPr b="1" dirty="0">
-                <a:latin typeface="Arial Narrow"/>
-                <a:cs typeface="Arial Narrow"/>
-              </a:rPr>
-              <a:t>c</a:t>
-            </a:r>
-            <a:r>
-              <a:rPr b="1" spc="4" dirty="0">
-                <a:latin typeface="Arial Narrow"/>
-                <a:cs typeface="Arial Narrow"/>
-              </a:rPr>
-              <a:t>c</a:t>
-            </a:r>
-            <a:r>
-              <a:rPr b="1" spc="-4" dirty="0">
-                <a:latin typeface="Arial Narrow"/>
-                <a:cs typeface="Arial Narrow"/>
-              </a:rPr>
-              <a:t>e</a:t>
-            </a:r>
-            <a:r>
-              <a:rPr b="1" dirty="0">
-                <a:latin typeface="Arial Narrow"/>
-                <a:cs typeface="Arial Narrow"/>
-              </a:rPr>
-              <a:t>ss</a:t>
-            </a:r>
-            <a:r>
-              <a:rPr b="1" spc="-4" dirty="0">
-                <a:latin typeface="Arial Narrow"/>
-                <a:cs typeface="Arial Narrow"/>
-              </a:rPr>
-              <a:t>-</a:t>
-            </a:r>
-            <a:r>
-              <a:rPr b="1" dirty="0">
-                <a:latin typeface="Arial Narrow"/>
-                <a:cs typeface="Arial Narrow"/>
-              </a:rPr>
-              <a:t>l</a:t>
-            </a:r>
-            <a:r>
-              <a:rPr b="1" spc="4" dirty="0">
-                <a:latin typeface="Arial Narrow"/>
-                <a:cs typeface="Arial Narrow"/>
-              </a:rPr>
-              <a:t>i</a:t>
-            </a:r>
-            <a:r>
-              <a:rPr b="1" spc="-4" dirty="0">
-                <a:latin typeface="Arial Narrow"/>
-                <a:cs typeface="Arial Narrow"/>
-              </a:rPr>
-              <a:t>s</a:t>
-            </a:r>
-            <a:r>
-              <a:rPr b="1" dirty="0">
-                <a:latin typeface="Arial Narrow"/>
-                <a:cs typeface="Arial Narrow"/>
-              </a:rPr>
-              <a:t>t </a:t>
-            </a:r>
-            <a:r>
-              <a:rPr b="1" spc="109" dirty="0">
-                <a:latin typeface="Arial Narrow"/>
-                <a:cs typeface="Arial Narrow"/>
-              </a:rPr>
-              <a:t> </a:t>
-            </a:r>
-            <a:r>
-              <a:rPr b="1" spc="-11" dirty="0">
-                <a:solidFill>
-                  <a:srgbClr val="3333CC"/>
-                </a:solidFill>
-                <a:latin typeface="Arial Narrow"/>
-                <a:cs typeface="Arial Narrow"/>
-              </a:rPr>
-              <a:t>núme</a:t>
-            </a:r>
-            <a:r>
-              <a:rPr b="1" spc="-4" dirty="0">
-                <a:solidFill>
-                  <a:srgbClr val="3333CC"/>
-                </a:solidFill>
-                <a:latin typeface="Arial Narrow"/>
-                <a:cs typeface="Arial Narrow"/>
-              </a:rPr>
-              <a:t>r</a:t>
-            </a:r>
-            <a:r>
-              <a:rPr b="1" dirty="0">
-                <a:solidFill>
-                  <a:srgbClr val="3333CC"/>
-                </a:solidFill>
-                <a:latin typeface="Arial Narrow"/>
-                <a:cs typeface="Arial Narrow"/>
-              </a:rPr>
-              <a:t>o_l</a:t>
-            </a:r>
-            <a:r>
-              <a:rPr b="1" spc="4" dirty="0">
-                <a:solidFill>
-                  <a:srgbClr val="3333CC"/>
-                </a:solidFill>
-                <a:latin typeface="Arial Narrow"/>
-                <a:cs typeface="Arial Narrow"/>
-              </a:rPr>
-              <a:t>i</a:t>
-            </a:r>
-            <a:r>
-              <a:rPr b="1" spc="-4" dirty="0">
-                <a:solidFill>
-                  <a:srgbClr val="3333CC"/>
-                </a:solidFill>
-                <a:latin typeface="Arial Narrow"/>
-                <a:cs typeface="Arial Narrow"/>
-              </a:rPr>
-              <a:t>st</a:t>
-            </a:r>
-            <a:r>
-              <a:rPr b="1" dirty="0">
-                <a:solidFill>
-                  <a:srgbClr val="3333CC"/>
-                </a:solidFill>
-                <a:latin typeface="Arial Narrow"/>
-                <a:cs typeface="Arial Narrow"/>
-              </a:rPr>
-              <a:t>a</a:t>
-            </a:r>
-            <a:r>
-              <a:rPr b="1" spc="60" dirty="0">
-                <a:solidFill>
-                  <a:srgbClr val="3333CC"/>
-                </a:solidFill>
-                <a:latin typeface="Arial Narrow"/>
-                <a:cs typeface="Arial Narrow"/>
-              </a:rPr>
-              <a:t> </a:t>
-            </a:r>
-            <a:r>
-              <a:rPr b="1" spc="-8" dirty="0">
-                <a:latin typeface="Arial Narrow"/>
-                <a:cs typeface="Arial Narrow"/>
-              </a:rPr>
-              <a:t>{</a:t>
-            </a:r>
-            <a:r>
-              <a:rPr b="1" spc="-11" dirty="0">
-                <a:solidFill>
-                  <a:srgbClr val="009900"/>
-                </a:solidFill>
-                <a:latin typeface="Arial Narrow"/>
-                <a:cs typeface="Arial Narrow"/>
-              </a:rPr>
-              <a:t>perm</a:t>
-            </a:r>
-            <a:r>
-              <a:rPr b="1" spc="-15" dirty="0">
-                <a:solidFill>
-                  <a:srgbClr val="009900"/>
-                </a:solidFill>
-                <a:latin typeface="Arial Narrow"/>
-                <a:cs typeface="Arial Narrow"/>
-              </a:rPr>
-              <a:t>i</a:t>
-            </a:r>
-            <a:r>
-              <a:rPr b="1" spc="-8" dirty="0">
-                <a:solidFill>
-                  <a:srgbClr val="009900"/>
-                </a:solidFill>
-                <a:latin typeface="Arial Narrow"/>
-                <a:cs typeface="Arial Narrow"/>
-              </a:rPr>
-              <a:t>t</a:t>
-            </a:r>
-            <a:r>
-              <a:rPr b="1" spc="60" dirty="0">
-                <a:solidFill>
-                  <a:srgbClr val="009900"/>
-                </a:solidFill>
-                <a:latin typeface="Arial Narrow"/>
-                <a:cs typeface="Arial Narrow"/>
-              </a:rPr>
-              <a:t> </a:t>
-            </a:r>
-            <a:r>
-              <a:rPr b="1" spc="-8" dirty="0">
-                <a:latin typeface="Arial Narrow"/>
-                <a:cs typeface="Arial Narrow"/>
-              </a:rPr>
-              <a:t>|</a:t>
-            </a:r>
-            <a:r>
-              <a:rPr b="1" spc="56" dirty="0">
-                <a:latin typeface="Arial Narrow"/>
-                <a:cs typeface="Arial Narrow"/>
-              </a:rPr>
-              <a:t> </a:t>
-            </a:r>
-            <a:r>
-              <a:rPr b="1" dirty="0">
-                <a:solidFill>
-                  <a:srgbClr val="FF3300"/>
-                </a:solidFill>
-                <a:latin typeface="Arial Narrow"/>
-                <a:cs typeface="Arial Narrow"/>
-              </a:rPr>
-              <a:t>den</a:t>
-            </a:r>
-            <a:r>
-              <a:rPr b="1" spc="-8" dirty="0">
-                <a:solidFill>
-                  <a:srgbClr val="FF3300"/>
-                </a:solidFill>
-                <a:latin typeface="Arial Narrow"/>
-                <a:cs typeface="Arial Narrow"/>
-              </a:rPr>
-              <a:t>y</a:t>
-            </a:r>
-            <a:r>
-              <a:rPr b="1" spc="-8" dirty="0">
-                <a:latin typeface="Arial Narrow"/>
-                <a:cs typeface="Arial Narrow"/>
-              </a:rPr>
-              <a:t>}</a:t>
-            </a:r>
-            <a:r>
-              <a:rPr b="1" dirty="0">
-                <a:latin typeface="Arial Narrow"/>
-                <a:cs typeface="Arial Narrow"/>
-              </a:rPr>
-              <a:t> </a:t>
-            </a:r>
-            <a:r>
-              <a:rPr b="1" spc="116" dirty="0">
-                <a:latin typeface="Arial Narrow"/>
-                <a:cs typeface="Arial Narrow"/>
-              </a:rPr>
-              <a:t> </a:t>
-            </a:r>
-            <a:r>
-              <a:rPr b="1" spc="-11" dirty="0">
-                <a:latin typeface="Arial Narrow"/>
-                <a:cs typeface="Arial Narrow"/>
-              </a:rPr>
-              <a:t>protoco</a:t>
-            </a:r>
-            <a:r>
-              <a:rPr b="1" spc="-19" dirty="0">
-                <a:latin typeface="Arial Narrow"/>
-                <a:cs typeface="Arial Narrow"/>
-              </a:rPr>
-              <a:t>l</a:t>
-            </a:r>
-            <a:r>
-              <a:rPr b="1" spc="-11" dirty="0">
-                <a:latin typeface="Arial Narrow"/>
-                <a:cs typeface="Arial Narrow"/>
-              </a:rPr>
-              <a:t>o</a:t>
-            </a:r>
-            <a:r>
-              <a:rPr b="1" spc="53" dirty="0">
-                <a:latin typeface="Arial Narrow"/>
-                <a:cs typeface="Arial Narrow"/>
-              </a:rPr>
-              <a:t> </a:t>
-            </a:r>
-            <a:r>
-              <a:rPr b="1" spc="-8" dirty="0">
-                <a:solidFill>
-                  <a:srgbClr val="3333CC"/>
-                </a:solidFill>
-                <a:latin typeface="Arial Narrow"/>
-                <a:cs typeface="Arial Narrow"/>
-              </a:rPr>
-              <a:t>ip_origen </a:t>
-            </a:r>
-            <a:r>
-              <a:rPr b="1" spc="-4" dirty="0">
-                <a:solidFill>
-                  <a:srgbClr val="3333CC"/>
-                </a:solidFill>
-                <a:latin typeface="Arial Narrow"/>
-                <a:cs typeface="Arial Narrow"/>
-              </a:rPr>
-              <a:t>w</a:t>
-            </a:r>
-            <a:r>
-              <a:rPr b="1" spc="4" dirty="0">
-                <a:solidFill>
-                  <a:srgbClr val="3333CC"/>
-                </a:solidFill>
-                <a:latin typeface="Arial Narrow"/>
-                <a:cs typeface="Arial Narrow"/>
-              </a:rPr>
-              <a:t>i</a:t>
-            </a:r>
-            <a:r>
-              <a:rPr b="1" spc="-8" dirty="0">
-                <a:solidFill>
-                  <a:srgbClr val="3333CC"/>
-                </a:solidFill>
-                <a:latin typeface="Arial Narrow"/>
-                <a:cs typeface="Arial Narrow"/>
-              </a:rPr>
-              <a:t>ldcard_</a:t>
-            </a:r>
-            <a:r>
-              <a:rPr b="1" spc="-19" dirty="0">
-                <a:solidFill>
-                  <a:srgbClr val="3333CC"/>
-                </a:solidFill>
-                <a:latin typeface="Arial Narrow"/>
-                <a:cs typeface="Arial Narrow"/>
-              </a:rPr>
-              <a:t>o</a:t>
-            </a:r>
-            <a:r>
-              <a:rPr b="1" spc="-8" dirty="0">
-                <a:solidFill>
-                  <a:srgbClr val="3333CC"/>
-                </a:solidFill>
-                <a:latin typeface="Arial Narrow"/>
-                <a:cs typeface="Arial Narrow"/>
-              </a:rPr>
-              <a:t>r</a:t>
-            </a:r>
-            <a:r>
-              <a:rPr b="1" dirty="0">
-                <a:solidFill>
-                  <a:srgbClr val="3333CC"/>
-                </a:solidFill>
-                <a:latin typeface="Arial Narrow"/>
-                <a:cs typeface="Arial Narrow"/>
-              </a:rPr>
-              <a:t>igen    </a:t>
-            </a:r>
-            <a:r>
-              <a:rPr b="1" spc="-75" dirty="0">
-                <a:solidFill>
-                  <a:srgbClr val="3333CC"/>
-                </a:solidFill>
-                <a:latin typeface="Arial Narrow"/>
-                <a:cs typeface="Arial Narrow"/>
-              </a:rPr>
-              <a:t> </a:t>
-            </a:r>
-            <a:r>
-              <a:rPr b="1" dirty="0">
-                <a:solidFill>
-                  <a:srgbClr val="3333CC"/>
-                </a:solidFill>
-                <a:latin typeface="Arial Narrow"/>
-                <a:cs typeface="Arial Narrow"/>
-              </a:rPr>
-              <a:t>ip_</a:t>
-            </a:r>
-            <a:r>
-              <a:rPr b="1" spc="4" dirty="0">
-                <a:solidFill>
-                  <a:srgbClr val="3333CC"/>
-                </a:solidFill>
-                <a:latin typeface="Arial Narrow"/>
-                <a:cs typeface="Arial Narrow"/>
-              </a:rPr>
-              <a:t>de</a:t>
-            </a:r>
-            <a:r>
-              <a:rPr b="1" spc="-4" dirty="0">
-                <a:solidFill>
-                  <a:srgbClr val="3333CC"/>
-                </a:solidFill>
-                <a:latin typeface="Arial Narrow"/>
-                <a:cs typeface="Arial Narrow"/>
-              </a:rPr>
-              <a:t>st</a:t>
-            </a:r>
-            <a:r>
-              <a:rPr b="1" spc="4" dirty="0">
-                <a:solidFill>
-                  <a:srgbClr val="3333CC"/>
-                </a:solidFill>
-                <a:latin typeface="Arial Narrow"/>
-                <a:cs typeface="Arial Narrow"/>
-              </a:rPr>
-              <a:t>i</a:t>
-            </a:r>
-            <a:r>
-              <a:rPr b="1" spc="-11" dirty="0">
-                <a:solidFill>
-                  <a:srgbClr val="3333CC"/>
-                </a:solidFill>
-                <a:latin typeface="Arial Narrow"/>
-                <a:cs typeface="Arial Narrow"/>
-              </a:rPr>
-              <a:t>no</a:t>
-            </a:r>
-            <a:r>
-              <a:rPr b="1" dirty="0">
-                <a:solidFill>
-                  <a:srgbClr val="3333CC"/>
-                </a:solidFill>
-                <a:latin typeface="Arial Narrow"/>
-                <a:cs typeface="Arial Narrow"/>
-              </a:rPr>
-              <a:t>    </a:t>
-            </a:r>
-            <a:r>
-              <a:rPr b="1" spc="-71" dirty="0">
-                <a:solidFill>
-                  <a:srgbClr val="3333CC"/>
-                </a:solidFill>
-                <a:latin typeface="Arial Narrow"/>
-                <a:cs typeface="Arial Narrow"/>
-              </a:rPr>
-              <a:t> </a:t>
-            </a:r>
-            <a:r>
-              <a:rPr b="1" spc="-4" dirty="0">
-                <a:solidFill>
-                  <a:srgbClr val="3333CC"/>
-                </a:solidFill>
-                <a:latin typeface="Arial Narrow"/>
-                <a:cs typeface="Arial Narrow"/>
-              </a:rPr>
-              <a:t>w</a:t>
-            </a:r>
-            <a:r>
-              <a:rPr b="1" spc="4" dirty="0">
-                <a:solidFill>
-                  <a:srgbClr val="3333CC"/>
-                </a:solidFill>
-                <a:latin typeface="Arial Narrow"/>
-                <a:cs typeface="Arial Narrow"/>
-              </a:rPr>
-              <a:t>i</a:t>
-            </a:r>
-            <a:r>
-              <a:rPr b="1" dirty="0">
-                <a:solidFill>
-                  <a:srgbClr val="3333CC"/>
-                </a:solidFill>
-                <a:latin typeface="Arial Narrow"/>
-                <a:cs typeface="Arial Narrow"/>
-              </a:rPr>
-              <a:t>ldcard_dest</a:t>
-            </a:r>
-            <a:r>
-              <a:rPr b="1" spc="4" dirty="0">
-                <a:solidFill>
-                  <a:srgbClr val="3333CC"/>
-                </a:solidFill>
-                <a:latin typeface="Arial Narrow"/>
-                <a:cs typeface="Arial Narrow"/>
-              </a:rPr>
-              <a:t>i</a:t>
-            </a:r>
-            <a:r>
-              <a:rPr b="1" spc="-11" dirty="0">
-                <a:solidFill>
-                  <a:srgbClr val="3333CC"/>
-                </a:solidFill>
-                <a:latin typeface="Arial Narrow"/>
-                <a:cs typeface="Arial Narrow"/>
-              </a:rPr>
-              <a:t>no</a:t>
-            </a:r>
-            <a:r>
-              <a:rPr b="1" dirty="0">
-                <a:solidFill>
-                  <a:srgbClr val="3333CC"/>
-                </a:solidFill>
-                <a:latin typeface="Arial Narrow"/>
-                <a:cs typeface="Arial Narrow"/>
-              </a:rPr>
-              <a:t>    </a:t>
-            </a:r>
-            <a:r>
-              <a:rPr b="1" spc="-71" dirty="0">
-                <a:solidFill>
-                  <a:srgbClr val="3333CC"/>
-                </a:solidFill>
-                <a:latin typeface="Arial Narrow"/>
-                <a:cs typeface="Arial Narrow"/>
-              </a:rPr>
-              <a:t> </a:t>
-            </a:r>
-            <a:r>
-              <a:rPr b="1" spc="-11" dirty="0">
-                <a:latin typeface="Arial Narrow"/>
-                <a:cs typeface="Arial Narrow"/>
-              </a:rPr>
-              <a:t>oper</a:t>
-            </a:r>
-            <a:r>
-              <a:rPr b="1" spc="-19" dirty="0">
-                <a:latin typeface="Arial Narrow"/>
-                <a:cs typeface="Arial Narrow"/>
-              </a:rPr>
-              <a:t>a</a:t>
-            </a:r>
-            <a:r>
-              <a:rPr b="1" spc="-11" dirty="0">
-                <a:latin typeface="Arial Narrow"/>
-                <a:cs typeface="Arial Narrow"/>
-              </a:rPr>
-              <a:t>ndo</a:t>
-            </a:r>
-            <a:r>
-              <a:rPr b="1" spc="-8" dirty="0">
-                <a:latin typeface="Arial Narrow"/>
-                <a:cs typeface="Arial Narrow"/>
-              </a:rPr>
-              <a:t> </a:t>
-            </a:r>
-            <a:r>
-              <a:rPr b="1" spc="-11" dirty="0">
-                <a:solidFill>
-                  <a:srgbClr val="3333CC"/>
-                </a:solidFill>
-                <a:latin typeface="Arial Narrow"/>
-                <a:cs typeface="Arial Narrow"/>
-              </a:rPr>
-              <a:t>número</a:t>
-            </a:r>
-            <a:r>
-              <a:rPr b="1" spc="-19" dirty="0">
-                <a:solidFill>
-                  <a:srgbClr val="3333CC"/>
-                </a:solidFill>
-                <a:latin typeface="Arial Narrow"/>
-                <a:cs typeface="Arial Narrow"/>
-              </a:rPr>
-              <a:t>_</a:t>
-            </a:r>
-            <a:r>
-              <a:rPr b="1" spc="-11" dirty="0">
-                <a:solidFill>
-                  <a:srgbClr val="3333CC"/>
-                </a:solidFill>
-                <a:latin typeface="Arial Narrow"/>
-                <a:cs typeface="Arial Narrow"/>
-              </a:rPr>
-              <a:t>puerto</a:t>
-            </a:r>
-            <a:endParaRPr dirty="0">
-              <a:latin typeface="Arial Narrow"/>
-              <a:cs typeface="Arial Narrow"/>
-            </a:endParaRPr>
-          </a:p>
-          <a:p>
-            <a:pPr>
-              <a:spcBef>
-                <a:spcPts val="8"/>
-              </a:spcBef>
-            </a:pPr>
-            <a:endParaRPr sz="2175" dirty="0">
-              <a:latin typeface="Times New Roman"/>
-              <a:cs typeface="Times New Roman"/>
-            </a:endParaRPr>
-          </a:p>
-          <a:p>
-            <a:pPr marL="9525" marR="117634">
-              <a:tabLst>
-                <a:tab pos="1295400" algn="l"/>
-                <a:tab pos="1657826" algn="l"/>
-                <a:tab pos="1946910" algn="l"/>
-                <a:tab pos="2492216" algn="l"/>
-                <a:tab pos="2854643" algn="l"/>
-                <a:tab pos="3701415" algn="l"/>
-                <a:tab pos="4063841" algn="l"/>
-                <a:tab pos="4912043" algn="l"/>
-                <a:tab pos="5140643" algn="l"/>
-              </a:tabLst>
-            </a:pPr>
-            <a:r>
-              <a:rPr sz="2100" b="1" spc="-11" dirty="0">
-                <a:latin typeface="Arial Narrow"/>
-                <a:cs typeface="Arial Narrow"/>
-              </a:rPr>
-              <a:t>Asignación	de	la</a:t>
-            </a:r>
-            <a:r>
-              <a:rPr sz="2100" b="1" dirty="0">
-                <a:latin typeface="Arial Narrow"/>
-                <a:cs typeface="Arial Narrow"/>
-              </a:rPr>
-              <a:t>	</a:t>
-            </a:r>
-            <a:r>
-              <a:rPr sz="2100" b="1" spc="-8" dirty="0">
-                <a:latin typeface="Arial Narrow"/>
-                <a:cs typeface="Arial Narrow"/>
-              </a:rPr>
-              <a:t>lis</a:t>
-            </a:r>
-            <a:r>
-              <a:rPr sz="2100" b="1" spc="-4" dirty="0">
-                <a:latin typeface="Arial Narrow"/>
-                <a:cs typeface="Arial Narrow"/>
-              </a:rPr>
-              <a:t>t</a:t>
-            </a:r>
-            <a:r>
-              <a:rPr sz="2100" b="1" spc="-11" dirty="0">
-                <a:latin typeface="Arial Narrow"/>
-                <a:cs typeface="Arial Narrow"/>
-              </a:rPr>
-              <a:t>a</a:t>
-            </a:r>
-            <a:r>
-              <a:rPr sz="2100" b="1" dirty="0">
-                <a:latin typeface="Arial Narrow"/>
-                <a:cs typeface="Arial Narrow"/>
-              </a:rPr>
-              <a:t>	</a:t>
-            </a:r>
-            <a:r>
-              <a:rPr sz="2100" b="1" spc="-11" dirty="0">
-                <a:latin typeface="Arial Narrow"/>
-                <a:cs typeface="Arial Narrow"/>
-              </a:rPr>
-              <a:t>de</a:t>
-            </a:r>
-            <a:r>
-              <a:rPr sz="2100" b="1" dirty="0">
-                <a:latin typeface="Arial Narrow"/>
-                <a:cs typeface="Arial Narrow"/>
-              </a:rPr>
-              <a:t>	</a:t>
-            </a:r>
-            <a:r>
-              <a:rPr sz="2100" b="1" spc="-15" dirty="0">
-                <a:latin typeface="Arial Narrow"/>
-                <a:cs typeface="Arial Narrow"/>
-              </a:rPr>
-              <a:t>contro</a:t>
-            </a:r>
-            <a:r>
-              <a:rPr sz="2100" b="1" spc="-8" dirty="0">
-                <a:latin typeface="Arial Narrow"/>
-                <a:cs typeface="Arial Narrow"/>
-              </a:rPr>
-              <a:t>l</a:t>
-            </a:r>
-            <a:r>
-              <a:rPr sz="2100" b="1" dirty="0">
-                <a:latin typeface="Arial Narrow"/>
-                <a:cs typeface="Arial Narrow"/>
-              </a:rPr>
-              <a:t>	</a:t>
-            </a:r>
-            <a:r>
-              <a:rPr sz="2100" b="1" spc="-11" dirty="0">
-                <a:latin typeface="Arial Narrow"/>
-                <a:cs typeface="Arial Narrow"/>
-              </a:rPr>
-              <a:t>de</a:t>
-            </a:r>
-            <a:r>
-              <a:rPr sz="2100" b="1" dirty="0">
-                <a:latin typeface="Arial Narrow"/>
-                <a:cs typeface="Arial Narrow"/>
-              </a:rPr>
-              <a:t>	</a:t>
-            </a:r>
-            <a:r>
-              <a:rPr sz="2100" b="1" spc="-15" dirty="0">
-                <a:latin typeface="Arial Narrow"/>
-                <a:cs typeface="Arial Narrow"/>
-              </a:rPr>
-              <a:t>acces</a:t>
-            </a:r>
-            <a:r>
-              <a:rPr sz="2100" b="1" spc="-11" dirty="0">
-                <a:latin typeface="Arial Narrow"/>
-                <a:cs typeface="Arial Narrow"/>
-              </a:rPr>
-              <a:t>o</a:t>
-            </a:r>
-            <a:r>
-              <a:rPr sz="2100" b="1" dirty="0">
-                <a:latin typeface="Arial Narrow"/>
-                <a:cs typeface="Arial Narrow"/>
-              </a:rPr>
-              <a:t>	</a:t>
-            </a:r>
-            <a:r>
-              <a:rPr sz="2100" b="1" spc="-11" dirty="0">
-                <a:latin typeface="Arial Narrow"/>
-                <a:cs typeface="Arial Narrow"/>
-              </a:rPr>
-              <a:t>a</a:t>
-            </a:r>
-            <a:r>
-              <a:rPr sz="2100" b="1" dirty="0">
-                <a:latin typeface="Arial Narrow"/>
-                <a:cs typeface="Arial Narrow"/>
-              </a:rPr>
-              <a:t>	</a:t>
-            </a:r>
-            <a:r>
-              <a:rPr sz="2100" b="1" spc="-11" dirty="0">
-                <a:latin typeface="Arial Narrow"/>
-                <a:cs typeface="Arial Narrow"/>
-              </a:rPr>
-              <a:t>una </a:t>
-            </a:r>
-            <a:r>
-              <a:rPr sz="2100" b="1" spc="-11" dirty="0" err="1">
-                <a:latin typeface="Arial Narrow"/>
-                <a:cs typeface="Arial Narrow"/>
-              </a:rPr>
-              <a:t>interfa</a:t>
-            </a:r>
-            <a:r>
-              <a:rPr lang="es-ES" sz="2100" b="1" spc="-11" dirty="0">
-                <a:latin typeface="Arial Narrow"/>
-                <a:cs typeface="Arial Narrow"/>
-              </a:rPr>
-              <a:t>z</a:t>
-            </a:r>
-            <a:r>
-              <a:rPr sz="2100" b="1" spc="-8" dirty="0">
-                <a:latin typeface="Arial Narrow"/>
-                <a:cs typeface="Arial Narrow"/>
-              </a:rPr>
-              <a:t> </a:t>
-            </a:r>
-            <a:r>
-              <a:rPr sz="2100" b="1" spc="-11" dirty="0">
-                <a:latin typeface="Arial Narrow"/>
-                <a:cs typeface="Arial Narrow"/>
-              </a:rPr>
-              <a:t>del</a:t>
-            </a:r>
-            <a:r>
-              <a:rPr sz="2100" b="1" spc="-4" dirty="0">
-                <a:latin typeface="Arial Narrow"/>
-                <a:cs typeface="Arial Narrow"/>
-              </a:rPr>
-              <a:t> </a:t>
-            </a:r>
-            <a:r>
-              <a:rPr sz="2100" b="1" spc="-11" dirty="0">
-                <a:latin typeface="Arial Narrow"/>
-                <a:cs typeface="Arial Narrow"/>
-              </a:rPr>
-              <a:t>ruteador</a:t>
-            </a:r>
-            <a:r>
-              <a:rPr sz="2100" b="1" spc="-8" dirty="0">
-                <a:latin typeface="Arial Narrow"/>
-                <a:cs typeface="Arial Narrow"/>
-              </a:rPr>
-              <a:t>:</a:t>
-            </a:r>
-            <a:endParaRPr sz="2100" dirty="0">
-              <a:latin typeface="Arial Narrow"/>
-              <a:cs typeface="Arial Narrow"/>
-            </a:endParaRPr>
-          </a:p>
-          <a:p>
-            <a:pPr marL="752475">
-              <a:spcBef>
-                <a:spcPts val="810"/>
-              </a:spcBef>
-              <a:tabLst>
-                <a:tab pos="1844040" algn="l"/>
-              </a:tabLst>
-            </a:pPr>
-            <a:r>
-              <a:rPr sz="2100" b="1" spc="-8" dirty="0">
-                <a:latin typeface="Arial Narrow"/>
-                <a:cs typeface="Arial Narrow"/>
-              </a:rPr>
-              <a:t>interfa</a:t>
-            </a:r>
-            <a:r>
-              <a:rPr sz="2100" b="1" spc="-19" dirty="0">
-                <a:latin typeface="Arial Narrow"/>
-                <a:cs typeface="Arial Narrow"/>
-              </a:rPr>
-              <a:t>c</a:t>
-            </a:r>
-            <a:r>
-              <a:rPr sz="2100" b="1" spc="-11" dirty="0">
-                <a:latin typeface="Arial Narrow"/>
-                <a:cs typeface="Arial Narrow"/>
-              </a:rPr>
-              <a:t>e</a:t>
-            </a:r>
-            <a:r>
-              <a:rPr sz="2100" b="1" dirty="0">
-                <a:latin typeface="Arial Narrow"/>
-                <a:cs typeface="Arial Narrow"/>
-              </a:rPr>
-              <a:t>	</a:t>
-            </a:r>
-            <a:r>
-              <a:rPr sz="2100" b="1" spc="-11" dirty="0">
-                <a:solidFill>
-                  <a:srgbClr val="3333CC"/>
-                </a:solidFill>
-                <a:latin typeface="Arial Narrow"/>
-                <a:cs typeface="Arial Narrow"/>
-              </a:rPr>
-              <a:t>int_número</a:t>
-            </a:r>
-            <a:endParaRPr sz="2100" dirty="0">
-              <a:latin typeface="Arial Narrow"/>
-              <a:cs typeface="Arial Narrow"/>
-            </a:endParaRPr>
-          </a:p>
-          <a:p>
-            <a:pPr marL="752475">
-              <a:spcBef>
-                <a:spcPts val="1080"/>
-              </a:spcBef>
-              <a:tabLst>
-                <a:tab pos="2547938" algn="l"/>
-              </a:tabLst>
-            </a:pPr>
-            <a:r>
-              <a:rPr sz="2100" b="1" spc="-11" dirty="0">
-                <a:latin typeface="Arial Narrow"/>
-                <a:cs typeface="Arial Narrow"/>
-              </a:rPr>
-              <a:t>ip</a:t>
-            </a:r>
-            <a:r>
-              <a:rPr sz="2100" b="1" dirty="0">
-                <a:latin typeface="Arial Narrow"/>
-                <a:cs typeface="Arial Narrow"/>
-              </a:rPr>
-              <a:t> </a:t>
-            </a:r>
-            <a:r>
-              <a:rPr sz="2100" b="1" spc="-15" dirty="0">
-                <a:latin typeface="Arial Narrow"/>
-                <a:cs typeface="Arial Narrow"/>
-              </a:rPr>
-              <a:t>access</a:t>
-            </a:r>
-            <a:r>
-              <a:rPr sz="2100" b="1" spc="-11" dirty="0">
-                <a:latin typeface="Arial Narrow"/>
-                <a:cs typeface="Arial Narrow"/>
-              </a:rPr>
-              <a:t>-group</a:t>
-            </a:r>
-            <a:r>
-              <a:rPr sz="2100" b="1" dirty="0">
-                <a:latin typeface="Arial Narrow"/>
-                <a:cs typeface="Arial Narrow"/>
-              </a:rPr>
-              <a:t>	</a:t>
-            </a:r>
-            <a:r>
-              <a:rPr sz="2100" b="1" spc="-11" dirty="0">
-                <a:solidFill>
-                  <a:srgbClr val="3333CC"/>
-                </a:solidFill>
-                <a:latin typeface="Arial Narrow"/>
-                <a:cs typeface="Arial Narrow"/>
-              </a:rPr>
-              <a:t>número_lista</a:t>
-            </a:r>
-            <a:r>
-              <a:rPr sz="2100" b="1" spc="-4" dirty="0">
-                <a:solidFill>
-                  <a:srgbClr val="3333CC"/>
-                </a:solidFill>
-                <a:latin typeface="Arial Narrow"/>
-                <a:cs typeface="Arial Narrow"/>
-              </a:rPr>
-              <a:t> </a:t>
-            </a:r>
-            <a:r>
-              <a:rPr sz="2100" b="1" spc="-8" dirty="0">
-                <a:latin typeface="Arial Narrow"/>
-                <a:cs typeface="Arial Narrow"/>
-              </a:rPr>
-              <a:t>{in</a:t>
-            </a:r>
-            <a:r>
-              <a:rPr sz="2100" b="1" spc="-15" dirty="0">
-                <a:latin typeface="Arial Narrow"/>
-                <a:cs typeface="Arial Narrow"/>
-              </a:rPr>
-              <a:t> </a:t>
-            </a:r>
-            <a:r>
-              <a:rPr sz="2100" b="1" spc="-8" dirty="0">
-                <a:latin typeface="Arial Narrow"/>
-                <a:cs typeface="Arial Narrow"/>
-              </a:rPr>
-              <a:t>|</a:t>
-            </a:r>
-            <a:r>
-              <a:rPr sz="2100" b="1" spc="8" dirty="0">
-                <a:latin typeface="Arial Narrow"/>
-                <a:cs typeface="Arial Narrow"/>
-              </a:rPr>
-              <a:t> </a:t>
-            </a:r>
-            <a:r>
-              <a:rPr sz="2100" b="1" spc="-11" dirty="0">
-                <a:latin typeface="Arial Narrow"/>
-                <a:cs typeface="Arial Narrow"/>
-              </a:rPr>
-              <a:t>ou</a:t>
-            </a:r>
-            <a:r>
-              <a:rPr sz="2100" b="1" spc="-4" dirty="0">
-                <a:latin typeface="Arial Narrow"/>
-                <a:cs typeface="Arial Narrow"/>
-              </a:rPr>
-              <a:t>t</a:t>
-            </a:r>
-            <a:r>
-              <a:rPr sz="2100" b="1" spc="-8" dirty="0">
-                <a:latin typeface="Arial Narrow"/>
-                <a:cs typeface="Arial Narrow"/>
-              </a:rPr>
-              <a:t>}</a:t>
-            </a:r>
-            <a:endParaRPr sz="2100" dirty="0">
-              <a:latin typeface="Arial Narrow"/>
-              <a:cs typeface="Arial Narrow"/>
-            </a:endParaRPr>
-          </a:p>
-        </p:txBody>
-      </p:sp>
-      <p:sp>
-        <p:nvSpPr>
-          <p:cNvPr id="8" name="object 2">
-            <a:extLst>
-              <a:ext uri="{FF2B5EF4-FFF2-40B4-BE49-F238E27FC236}">
-                <a16:creationId xmlns:a16="http://schemas.microsoft.com/office/drawing/2014/main" id="{257E321D-AB3B-4F6E-89EC-D5AD1090E97F}"/>
-              </a:ext>
-            </a:extLst>
-          </p:cNvPr>
-          <p:cNvSpPr txBox="1">
-            <a:spLocks/>
-          </p:cNvSpPr>
-          <p:nvPr/>
-        </p:nvSpPr>
-        <p:spPr>
-          <a:xfrm>
-            <a:off x="596320" y="251215"/>
-            <a:ext cx="7848872" cy="984885"/>
-          </a:xfrm>
-          <a:prstGeom prst="rect">
-            <a:avLst/>
-          </a:prstGeom>
-        </p:spPr>
-        <p:txBody>
-          <a:bodyPr vert="horz" wrap="square" lIns="0" tIns="0" rIns="0" bIns="0" rtlCol="0" anchor="ctr">
-            <a:spAutoFit/>
-          </a:bodyPr>
-          <a:lstStyle>
-            <a:lvl1pPr algn="ctr" defTabSz="914400" rtl="0" eaLnBrk="1" latinLnBrk="0" hangingPunct="1">
-              <a:spcBef>
-                <a:spcPct val="0"/>
-              </a:spcBef>
-              <a:buNone/>
-              <a:defRPr sz="2700" b="1" i="0" kern="1200">
-                <a:solidFill>
-                  <a:schemeClr val="bg1"/>
-                </a:solidFill>
-                <a:latin typeface="Arial Narrow"/>
-                <a:ea typeface="+mj-ea"/>
-                <a:cs typeface="Arial Narrow"/>
-              </a:defRPr>
-            </a:lvl1pPr>
-          </a:lstStyle>
-          <a:p>
-            <a:pPr marL="92075"/>
-            <a:r>
-              <a:rPr lang="es-MX" sz="3200" spc="-15" dirty="0">
-                <a:solidFill>
-                  <a:schemeClr val="accent4">
-                    <a:lumMod val="50000"/>
-                  </a:schemeClr>
-                </a:solidFill>
-                <a:latin typeface="Dom Casual"/>
-              </a:rPr>
-              <a:t>Comandos para crear listas de control de acceso extendidas</a:t>
-            </a:r>
-          </a:p>
-        </p:txBody>
-      </p:sp>
-    </p:spTree>
-    <p:extLst>
-      <p:ext uri="{BB962C8B-B14F-4D97-AF65-F5344CB8AC3E}">
-        <p14:creationId xmlns:p14="http://schemas.microsoft.com/office/powerpoint/2010/main" val="1726275846"/>
-      </p:ext>
-    </p:extLst>
-  </p:cSld>
-  <p:clrMapOvr>
-    <a:masterClrMapping/>
-  </p:clrMapOvr>
-</p:sld>
-</file>
-
-<file path=ppt/slides/slide12.xml><?xml version="1.0" encoding="utf-8"?>
-<p:sld xmlns:a="http://schemas.openxmlformats.org/drawingml/2006/main" xmlns:r="http://schemas.openxmlformats.org/officeDocument/2006/relationships" xmlns:p="http://schemas.openxmlformats.org/presentationml/2006/main">
-  <p:cSld>
-    <p:spTree>
-      <p:nvGrpSpPr>
-        <p:cNvPr id="1" name=""/>
-        <p:cNvGrpSpPr/>
-        <p:nvPr/>
-      </p:nvGrpSpPr>
-      <p:grpSpPr>
-        <a:xfrm>
-          <a:off x="0" y="0"/>
-          <a:ext cx="0" cy="0"/>
-          <a:chOff x="0" y="0"/>
-          <a:chExt cx="0" cy="0"/>
-        </a:xfrm>
-      </p:grpSpPr>
-      <p:sp>
-        <p:nvSpPr>
           <p:cNvPr id="4" name="Content Placeholder 3">
             <a:extLst>
               <a:ext uri="{FF2B5EF4-FFF2-40B4-BE49-F238E27FC236}">
@@ -6808,7 +5110,7 @@
         <p:fade/>
       </p:transition>
     </mc:Choice>
-    <mc:Fallback xmlns="" xmlns:c="http://schemas.openxmlformats.org/drawingml/2006/chart" xmlns:c15="http://schemas.microsoft.com/office/drawing/2012/chart">
+    <mc:Fallback xmlns:c15="http://schemas.microsoft.com/office/drawing/2012/chart" xmlns:c="http://schemas.openxmlformats.org/drawingml/2006/chart" xmlns="">
       <p:transition spd="med">
         <p:fade/>
       </p:transition>
@@ -6817,7 +5119,7 @@
 </p:sld>
 </file>
 
-<file path=ppt/slides/slide13.xml><?xml version="1.0" encoding="utf-8"?>
+<file path=ppt/slides/slide11.xml><?xml version="1.0" encoding="utf-8"?>
 <p:sld xmlns:a="http://schemas.openxmlformats.org/drawingml/2006/main" xmlns:r="http://schemas.openxmlformats.org/officeDocument/2006/relationships" xmlns:p="http://schemas.openxmlformats.org/presentationml/2006/main">
   <p:cSld>
     <p:spTree>
@@ -6980,7 +5282,7 @@
         <p:fade/>
       </p:transition>
     </mc:Choice>
-    <mc:Fallback xmlns="" xmlns:c="http://schemas.openxmlformats.org/drawingml/2006/chart" xmlns:c15="http://schemas.microsoft.com/office/drawing/2012/chart">
+    <mc:Fallback xmlns:c15="http://schemas.microsoft.com/office/drawing/2012/chart" xmlns:c="http://schemas.openxmlformats.org/drawingml/2006/chart" xmlns="">
       <p:transition spd="med">
         <p:fade/>
       </p:transition>
@@ -6989,7 +5291,7 @@
 </p:sld>
 </file>
 
-<file path=ppt/slides/slide14.xml><?xml version="1.0" encoding="utf-8"?>
+<file path=ppt/slides/slide12.xml><?xml version="1.0" encoding="utf-8"?>
 <p:sld xmlns:a="http://schemas.openxmlformats.org/drawingml/2006/main" xmlns:r="http://schemas.openxmlformats.org/officeDocument/2006/relationships" xmlns:p="http://schemas.openxmlformats.org/presentationml/2006/main">
   <p:cSld>
     <p:spTree>
@@ -7438,7 +5740,7 @@
         <p:fade/>
       </p:transition>
     </mc:Choice>
-    <mc:Fallback xmlns="" xmlns:c="http://schemas.openxmlformats.org/drawingml/2006/chart" xmlns:c15="http://schemas.microsoft.com/office/drawing/2012/chart">
+    <mc:Fallback xmlns:c15="http://schemas.microsoft.com/office/drawing/2012/chart" xmlns:c="http://schemas.openxmlformats.org/drawingml/2006/chart" xmlns="">
       <p:transition spd="med">
         <p:fade/>
       </p:transition>
@@ -7447,7 +5749,7 @@
 </p:sld>
 </file>
 
-<file path=ppt/slides/slide15.xml><?xml version="1.0" encoding="utf-8"?>
+<file path=ppt/slides/slide13.xml><?xml version="1.0" encoding="utf-8"?>
 <p:sld xmlns:a="http://schemas.openxmlformats.org/drawingml/2006/main" xmlns:r="http://schemas.openxmlformats.org/officeDocument/2006/relationships" xmlns:p="http://schemas.openxmlformats.org/presentationml/2006/main">
   <p:cSld>
     <p:spTree>
@@ -7822,7 +6124,7 @@
 </p:sld>
 </file>
 
-<file path=ppt/slides/slide16.xml><?xml version="1.0" encoding="utf-8"?>
+<file path=ppt/slides/slide14.xml><?xml version="1.0" encoding="utf-8"?>
 <p:sld xmlns:a="http://schemas.openxmlformats.org/drawingml/2006/main" xmlns:r="http://schemas.openxmlformats.org/officeDocument/2006/relationships" xmlns:p="http://schemas.openxmlformats.org/presentationml/2006/main">
   <p:cSld>
     <p:spTree>
@@ -12403,7 +10705,7 @@
         <p:spPr>
           <a:xfrm>
             <a:off x="1403648" y="1772816"/>
-            <a:ext cx="6552728" cy="3000180"/>
+            <a:ext cx="6552728" cy="3299365"/>
           </a:xfrm>
           <a:prstGeom prst="rect">
             <a:avLst/>
@@ -12424,7 +10726,7 @@
               </a:spcAft>
             </a:pPr>
             <a:r>
-              <a:rPr lang="es-ES" b="1" spc="-15" dirty="0">
+              <a:rPr lang="es-ES" sz="2000" b="1" spc="-15" dirty="0">
                 <a:solidFill>
                   <a:schemeClr val="accent6">
                     <a:lumMod val="75000"/>
@@ -12432,10 +10734,10 @@
                 </a:solidFill>
                 <a:cs typeface="Times New Roman"/>
               </a:rPr>
-              <a:t>Las </a:t>
-            </a:r>
-            <a:r>
-              <a:rPr b="1" spc="-11" dirty="0" err="1">
+              <a:t>Las listas de control de acceso</a:t>
+            </a:r>
+            <a:r>
+              <a:rPr lang="es-ES" sz="2000" b="1" spc="-11" dirty="0">
                 <a:solidFill>
                   <a:schemeClr val="accent6">
                     <a:lumMod val="75000"/>
@@ -12443,196 +10745,9 @@
                 </a:solidFill>
                 <a:cs typeface="Times New Roman"/>
               </a:rPr>
-              <a:t>List</a:t>
-            </a:r>
-            <a:r>
-              <a:rPr b="1" spc="-4" dirty="0" err="1">
-                <a:solidFill>
-                  <a:schemeClr val="accent6">
-                    <a:lumMod val="75000"/>
-                  </a:schemeClr>
-                </a:solidFill>
-                <a:cs typeface="Times New Roman"/>
-              </a:rPr>
-              <a:t>a</a:t>
-            </a:r>
-            <a:r>
-              <a:rPr b="1" spc="-11" dirty="0" err="1">
-                <a:solidFill>
-                  <a:schemeClr val="accent6">
-                    <a:lumMod val="75000"/>
-                  </a:schemeClr>
-                </a:solidFill>
-                <a:cs typeface="Times New Roman"/>
-              </a:rPr>
-              <a:t>s</a:t>
-            </a:r>
-            <a:r>
-              <a:rPr b="1" spc="-19" dirty="0">
-                <a:solidFill>
-                  <a:schemeClr val="accent6">
-                    <a:lumMod val="75000"/>
-                  </a:schemeClr>
-                </a:solidFill>
-                <a:cs typeface="Times New Roman"/>
-              </a:rPr>
-              <a:t> </a:t>
-            </a:r>
-            <a:r>
-              <a:rPr b="1" spc="-11" dirty="0">
-                <a:solidFill>
-                  <a:schemeClr val="accent6">
-                    <a:lumMod val="75000"/>
-                  </a:schemeClr>
-                </a:solidFill>
-                <a:cs typeface="Times New Roman"/>
-              </a:rPr>
-              <a:t>de</a:t>
-            </a:r>
-            <a:r>
-              <a:rPr b="1" spc="-4" dirty="0">
-                <a:solidFill>
-                  <a:schemeClr val="accent6">
-                    <a:lumMod val="75000"/>
-                  </a:schemeClr>
-                </a:solidFill>
-                <a:cs typeface="Times New Roman"/>
-              </a:rPr>
-              <a:t> </a:t>
-            </a:r>
-            <a:r>
-              <a:rPr b="1" spc="-15" dirty="0">
-                <a:solidFill>
-                  <a:schemeClr val="accent6">
-                    <a:lumMod val="75000"/>
-                  </a:schemeClr>
-                </a:solidFill>
-                <a:cs typeface="Times New Roman"/>
-              </a:rPr>
-              <a:t>Co</a:t>
-            </a:r>
-            <a:r>
-              <a:rPr b="1" spc="-11" dirty="0">
-                <a:solidFill>
-                  <a:schemeClr val="accent6">
-                    <a:lumMod val="75000"/>
-                  </a:schemeClr>
-                </a:solidFill>
-                <a:cs typeface="Times New Roman"/>
-              </a:rPr>
-              <a:t>n</a:t>
-            </a:r>
-            <a:r>
-              <a:rPr b="1" spc="-8" dirty="0">
-                <a:solidFill>
-                  <a:schemeClr val="accent6">
-                    <a:lumMod val="75000"/>
-                  </a:schemeClr>
-                </a:solidFill>
-                <a:cs typeface="Times New Roman"/>
-              </a:rPr>
-              <a:t>t</a:t>
-            </a:r>
-            <a:r>
-              <a:rPr b="1" spc="-49" dirty="0">
-                <a:solidFill>
-                  <a:schemeClr val="accent6">
-                    <a:lumMod val="75000"/>
-                  </a:schemeClr>
-                </a:solidFill>
-                <a:cs typeface="Times New Roman"/>
-              </a:rPr>
-              <a:t>r</a:t>
-            </a:r>
-            <a:r>
-              <a:rPr b="1" spc="-11" dirty="0">
-                <a:solidFill>
-                  <a:schemeClr val="accent6">
-                    <a:lumMod val="75000"/>
-                  </a:schemeClr>
-                </a:solidFill>
-                <a:cs typeface="Times New Roman"/>
-              </a:rPr>
-              <a:t>ol</a:t>
-            </a:r>
-            <a:r>
-              <a:rPr b="1" spc="-4" dirty="0">
-                <a:solidFill>
-                  <a:schemeClr val="accent6">
-                    <a:lumMod val="75000"/>
-                  </a:schemeClr>
-                </a:solidFill>
-                <a:cs typeface="Times New Roman"/>
-              </a:rPr>
-              <a:t> </a:t>
-            </a:r>
-            <a:r>
-              <a:rPr b="1" spc="-11" dirty="0">
-                <a:solidFill>
-                  <a:schemeClr val="accent6">
-                    <a:lumMod val="75000"/>
-                  </a:schemeClr>
-                </a:solidFill>
-                <a:cs typeface="Times New Roman"/>
-              </a:rPr>
-              <a:t>de</a:t>
-            </a:r>
-            <a:r>
-              <a:rPr b="1" spc="-124" dirty="0">
-                <a:solidFill>
-                  <a:schemeClr val="accent6">
-                    <a:lumMod val="75000"/>
-                  </a:schemeClr>
-                </a:solidFill>
-                <a:cs typeface="Times New Roman"/>
-              </a:rPr>
-              <a:t> </a:t>
-            </a:r>
-            <a:r>
-              <a:rPr b="1" spc="-15" dirty="0" err="1">
-                <a:solidFill>
-                  <a:schemeClr val="accent6">
-                    <a:lumMod val="75000"/>
-                  </a:schemeClr>
-                </a:solidFill>
-                <a:cs typeface="Times New Roman"/>
-              </a:rPr>
-              <a:t>Ac</a:t>
-            </a:r>
-            <a:r>
-              <a:rPr b="1" spc="-23" dirty="0" err="1">
-                <a:solidFill>
-                  <a:schemeClr val="accent6">
-                    <a:lumMod val="75000"/>
-                  </a:schemeClr>
-                </a:solidFill>
-                <a:cs typeface="Times New Roman"/>
-              </a:rPr>
-              <a:t>c</a:t>
-            </a:r>
-            <a:r>
-              <a:rPr b="1" spc="-11" dirty="0" err="1">
-                <a:solidFill>
-                  <a:schemeClr val="accent6">
-                    <a:lumMod val="75000"/>
-                  </a:schemeClr>
-                </a:solidFill>
-                <a:cs typeface="Times New Roman"/>
-              </a:rPr>
-              <a:t>eso</a:t>
-            </a:r>
-            <a:r>
-              <a:rPr lang="es-ES" b="1" spc="-11" dirty="0">
-                <a:solidFill>
-                  <a:schemeClr val="accent6">
-                    <a:lumMod val="75000"/>
-                  </a:schemeClr>
-                </a:solidFill>
-                <a:cs typeface="Times New Roman"/>
-              </a:rPr>
               <a:t> se utilizan para:</a:t>
             </a:r>
-            <a:endParaRPr dirty="0">
+            <a:endParaRPr sz="2000" dirty="0">
               <a:solidFill>
                 <a:schemeClr val="accent6">
                   <a:lumMod val="75000"/>
@@ -12656,198 +10771,198 @@
               </a:tabLst>
             </a:pPr>
             <a:r>
-              <a:rPr spc="-15" dirty="0" err="1">
+              <a:rPr sz="2000" spc="-15" dirty="0" err="1">
                 <a:cs typeface="Times New Roman"/>
               </a:rPr>
               <a:t>L</a:t>
             </a:r>
             <a:r>
-              <a:rPr spc="-4" dirty="0" err="1">
+              <a:rPr sz="2000" spc="-4" dirty="0" err="1">
                 <a:cs typeface="Times New Roman"/>
               </a:rPr>
               <a:t>i</a:t>
             </a:r>
             <a:r>
-              <a:rPr spc="-30" dirty="0" err="1">
+              <a:rPr sz="2000" spc="-30" dirty="0" err="1">
                 <a:cs typeface="Times New Roman"/>
               </a:rPr>
               <a:t>m</a:t>
             </a:r>
             <a:r>
-              <a:rPr spc="-8" dirty="0" err="1">
+              <a:rPr sz="2000" spc="-8" dirty="0" err="1">
                 <a:cs typeface="Times New Roman"/>
               </a:rPr>
               <a:t>itar</a:t>
             </a:r>
             <a:r>
-              <a:rPr spc="199" dirty="0">
-                <a:cs typeface="Times New Roman"/>
-              </a:rPr>
-              <a:t> </a:t>
-            </a:r>
-            <a:r>
-              <a:rPr spc="-19" dirty="0">
+              <a:rPr sz="2000" spc="199" dirty="0">
+                <a:cs typeface="Times New Roman"/>
+              </a:rPr>
+              <a:t> </a:t>
+            </a:r>
+            <a:r>
+              <a:rPr sz="2000" spc="-19" dirty="0">
                 <a:cs typeface="Times New Roman"/>
               </a:rPr>
               <a:t>e</a:t>
             </a:r>
             <a:r>
-              <a:rPr spc="-8" dirty="0">
+              <a:rPr sz="2000" spc="-8" dirty="0">
                 <a:cs typeface="Times New Roman"/>
               </a:rPr>
               <a:t>l</a:t>
             </a:r>
             <a:r>
-              <a:rPr spc="203" dirty="0">
-                <a:cs typeface="Times New Roman"/>
-              </a:rPr>
-              <a:t> </a:t>
-            </a:r>
-            <a:r>
-              <a:rPr spc="-8" dirty="0">
+              <a:rPr sz="2000" spc="203" dirty="0">
+                <a:cs typeface="Times New Roman"/>
+              </a:rPr>
+              <a:t> </a:t>
+            </a:r>
+            <a:r>
+              <a:rPr sz="2000" spc="-8" dirty="0">
                 <a:cs typeface="Times New Roman"/>
               </a:rPr>
               <a:t>tráf</a:t>
             </a:r>
             <a:r>
-              <a:rPr spc="-4" dirty="0">
+              <a:rPr sz="2000" spc="-4" dirty="0">
                 <a:cs typeface="Times New Roman"/>
               </a:rPr>
               <a:t>i</a:t>
             </a:r>
             <a:r>
-              <a:rPr spc="-11" dirty="0">
+              <a:rPr sz="2000" spc="-11" dirty="0">
                 <a:cs typeface="Times New Roman"/>
               </a:rPr>
               <a:t>co</a:t>
             </a:r>
             <a:r>
-              <a:rPr spc="195" dirty="0">
-                <a:cs typeface="Times New Roman"/>
-              </a:rPr>
-              <a:t> </a:t>
-            </a:r>
-            <a:r>
-              <a:rPr spc="-8" dirty="0">
+              <a:rPr sz="2000" spc="195" dirty="0">
+                <a:cs typeface="Times New Roman"/>
+              </a:rPr>
+              <a:t> </a:t>
+            </a:r>
+            <a:r>
+              <a:rPr sz="2000" spc="-8" dirty="0">
                 <a:cs typeface="Times New Roman"/>
               </a:rPr>
               <a:t>d</a:t>
             </a:r>
             <a:r>
-              <a:rPr spc="-11" dirty="0">
+              <a:rPr sz="2000" spc="-11" dirty="0">
                 <a:cs typeface="Times New Roman"/>
               </a:rPr>
               <a:t>e</a:t>
             </a:r>
             <a:r>
-              <a:rPr spc="199" dirty="0">
-                <a:cs typeface="Times New Roman"/>
-              </a:rPr>
-              <a:t> </a:t>
-            </a:r>
-            <a:r>
-              <a:rPr spc="-11" dirty="0">
+              <a:rPr sz="2000" spc="199" dirty="0">
+                <a:cs typeface="Times New Roman"/>
+              </a:rPr>
+              <a:t> </a:t>
+            </a:r>
+            <a:r>
+              <a:rPr sz="2000" spc="-11" dirty="0">
                 <a:cs typeface="Times New Roman"/>
               </a:rPr>
               <a:t>la</a:t>
             </a:r>
             <a:r>
-              <a:rPr spc="188" dirty="0">
-                <a:cs typeface="Times New Roman"/>
-              </a:rPr>
-              <a:t> </a:t>
-            </a:r>
-            <a:r>
-              <a:rPr spc="-11" dirty="0">
+              <a:rPr sz="2000" spc="188" dirty="0">
+                <a:cs typeface="Times New Roman"/>
+              </a:rPr>
+              <a:t> </a:t>
+            </a:r>
+            <a:r>
+              <a:rPr sz="2000" spc="-11" dirty="0">
                 <a:cs typeface="Times New Roman"/>
               </a:rPr>
               <a:t>red</a:t>
             </a:r>
             <a:r>
-              <a:rPr spc="206" dirty="0">
-                <a:cs typeface="Times New Roman"/>
-              </a:rPr>
-              <a:t> </a:t>
-            </a:r>
-            <a:r>
-              <a:rPr spc="-11" dirty="0">
+              <a:rPr sz="2000" spc="206" dirty="0">
+                <a:cs typeface="Times New Roman"/>
+              </a:rPr>
+              <a:t> </a:t>
+            </a:r>
+            <a:r>
+              <a:rPr sz="2000" spc="-11" dirty="0">
                 <a:cs typeface="Times New Roman"/>
               </a:rPr>
               <a:t>e</a:t>
             </a:r>
             <a:r>
-              <a:rPr spc="199" dirty="0">
-                <a:cs typeface="Times New Roman"/>
-              </a:rPr>
-              <a:t> </a:t>
-            </a:r>
-            <a:r>
-              <a:rPr spc="-8" dirty="0" err="1">
+              <a:rPr sz="2000" spc="199" dirty="0">
+                <a:cs typeface="Times New Roman"/>
+              </a:rPr>
+              <a:t> </a:t>
+            </a:r>
+            <a:r>
+              <a:rPr sz="2000" spc="-8" dirty="0" err="1">
                 <a:cs typeface="Times New Roman"/>
               </a:rPr>
               <a:t>in</a:t>
             </a:r>
             <a:r>
-              <a:rPr spc="-11" dirty="0" err="1">
+              <a:rPr sz="2000" spc="-11" dirty="0" err="1">
                 <a:cs typeface="Times New Roman"/>
               </a:rPr>
               <a:t>cre</a:t>
             </a:r>
             <a:r>
-              <a:rPr spc="-38" dirty="0" err="1">
+              <a:rPr sz="2000" spc="-38" dirty="0" err="1">
                 <a:cs typeface="Times New Roman"/>
               </a:rPr>
               <a:t>m</a:t>
             </a:r>
             <a:r>
-              <a:rPr spc="-11" dirty="0" err="1">
+              <a:rPr sz="2000" spc="-11" dirty="0" err="1">
                 <a:cs typeface="Times New Roman"/>
               </a:rPr>
               <a:t>ent</a:t>
             </a:r>
             <a:r>
-              <a:rPr spc="-8" dirty="0" err="1">
+              <a:rPr sz="2000" spc="-8" dirty="0" err="1">
                 <a:cs typeface="Times New Roman"/>
               </a:rPr>
               <a:t>a</a:t>
             </a:r>
             <a:r>
-              <a:rPr lang="es-ES" spc="-8" dirty="0">
+              <a:rPr lang="es-ES" sz="2000" spc="-8" dirty="0">
                 <a:cs typeface="Times New Roman"/>
               </a:rPr>
               <a:t>r su</a:t>
             </a:r>
             <a:r>
-              <a:rPr lang="es-ES" spc="203" dirty="0">
-                <a:cs typeface="Times New Roman"/>
-              </a:rPr>
-              <a:t> </a:t>
-            </a:r>
-            <a:r>
-              <a:rPr spc="-11" dirty="0" err="1">
+              <a:rPr lang="es-ES" sz="2000" spc="203" dirty="0">
+                <a:cs typeface="Times New Roman"/>
+              </a:rPr>
+              <a:t> </a:t>
+            </a:r>
+            <a:r>
+              <a:rPr sz="2000" spc="-11" dirty="0" err="1">
                 <a:cs typeface="Times New Roman"/>
               </a:rPr>
               <a:t>dese</a:t>
             </a:r>
             <a:r>
-              <a:rPr spc="-34" dirty="0" err="1">
+              <a:rPr sz="2000" spc="-34" dirty="0" err="1">
                 <a:cs typeface="Times New Roman"/>
               </a:rPr>
               <a:t>m</a:t>
             </a:r>
             <a:r>
-              <a:rPr spc="-11" dirty="0" err="1">
+              <a:rPr sz="2000" spc="-11" dirty="0" err="1">
                 <a:cs typeface="Times New Roman"/>
               </a:rPr>
               <a:t>peño</a:t>
             </a:r>
             <a:r>
-              <a:rPr lang="es-ES" spc="-11" dirty="0">
+              <a:rPr lang="es-ES" sz="2000" spc="-11" dirty="0">
                 <a:cs typeface="Times New Roman"/>
               </a:rPr>
               <a:t>.</a:t>
             </a:r>
-            <a:endParaRPr dirty="0">
+            <a:endParaRPr sz="2000" dirty="0">
               <a:cs typeface="Times New Roman"/>
             </a:endParaRPr>
           </a:p>
@@ -12863,150 +10978,150 @@
               <a:buChar char="•"/>
             </a:pPr>
             <a:r>
-              <a:rPr spc="-15" dirty="0" err="1">
+              <a:rPr sz="2000" spc="-15" dirty="0" err="1">
                 <a:cs typeface="Times New Roman"/>
               </a:rPr>
               <a:t>S</a:t>
             </a:r>
             <a:r>
-              <a:rPr spc="-8" dirty="0" err="1">
+              <a:rPr sz="2000" spc="-8" dirty="0" err="1">
                 <a:cs typeface="Times New Roman"/>
               </a:rPr>
               <a:t>u</a:t>
             </a:r>
             <a:r>
-              <a:rPr spc="-30" dirty="0" err="1">
+              <a:rPr sz="2000" spc="-30" dirty="0" err="1">
                 <a:cs typeface="Times New Roman"/>
               </a:rPr>
               <a:t>m</a:t>
             </a:r>
             <a:r>
-              <a:rPr spc="-8" dirty="0" err="1">
+              <a:rPr sz="2000" spc="-8" dirty="0" err="1">
                 <a:cs typeface="Times New Roman"/>
               </a:rPr>
               <a:t>inis</a:t>
             </a:r>
             <a:r>
-              <a:rPr spc="-4" dirty="0" err="1">
+              <a:rPr sz="2000" spc="-4" dirty="0" err="1">
                 <a:cs typeface="Times New Roman"/>
               </a:rPr>
               <a:t>t</a:t>
             </a:r>
             <a:r>
-              <a:rPr spc="-11" dirty="0" err="1">
+              <a:rPr sz="2000" spc="-11" dirty="0" err="1">
                 <a:cs typeface="Times New Roman"/>
               </a:rPr>
               <a:t>rar</a:t>
             </a:r>
             <a:r>
-              <a:rPr spc="8" dirty="0">
-                <a:cs typeface="Times New Roman"/>
-              </a:rPr>
-              <a:t> </a:t>
-            </a:r>
-            <a:r>
-              <a:rPr spc="-30" dirty="0">
+              <a:rPr sz="2000" spc="8" dirty="0">
+                <a:cs typeface="Times New Roman"/>
+              </a:rPr>
+              <a:t> </a:t>
+            </a:r>
+            <a:r>
+              <a:rPr sz="2000" spc="-30" dirty="0">
                 <a:cs typeface="Times New Roman"/>
               </a:rPr>
               <a:t>m</a:t>
             </a:r>
             <a:r>
-              <a:rPr spc="-11" dirty="0">
+              <a:rPr sz="2000" spc="-11" dirty="0">
                 <a:cs typeface="Times New Roman"/>
               </a:rPr>
               <a:t>e</a:t>
             </a:r>
             <a:r>
-              <a:rPr spc="-23" dirty="0">
+              <a:rPr sz="2000" spc="-23" dirty="0">
                 <a:cs typeface="Times New Roman"/>
               </a:rPr>
               <a:t>c</a:t>
             </a:r>
             <a:r>
-              <a:rPr spc="-11" dirty="0">
+              <a:rPr sz="2000" spc="-11" dirty="0">
                 <a:cs typeface="Times New Roman"/>
               </a:rPr>
               <a:t>anismos</a:t>
             </a:r>
             <a:r>
-              <a:rPr spc="4" dirty="0">
-                <a:cs typeface="Times New Roman"/>
-              </a:rPr>
-              <a:t> </a:t>
-            </a:r>
-            <a:r>
-              <a:rPr spc="-8" dirty="0">
+              <a:rPr sz="2000" spc="4" dirty="0">
+                <a:cs typeface="Times New Roman"/>
+              </a:rPr>
+              <a:t> </a:t>
+            </a:r>
+            <a:r>
+              <a:rPr sz="2000" spc="-8" dirty="0">
                 <a:cs typeface="Times New Roman"/>
               </a:rPr>
               <a:t>d</a:t>
             </a:r>
             <a:r>
-              <a:rPr spc="-11" dirty="0">
+              <a:rPr sz="2000" spc="-11" dirty="0">
                 <a:cs typeface="Times New Roman"/>
               </a:rPr>
               <a:t>e</a:t>
             </a:r>
             <a:r>
-              <a:rPr spc="-8" dirty="0">
-                <a:cs typeface="Times New Roman"/>
-              </a:rPr>
-              <a:t> </a:t>
-            </a:r>
-            <a:r>
-              <a:rPr spc="-11" dirty="0">
+              <a:rPr sz="2000" spc="-8" dirty="0">
+                <a:cs typeface="Times New Roman"/>
+              </a:rPr>
+              <a:t> </a:t>
+            </a:r>
+            <a:r>
+              <a:rPr sz="2000" spc="-11" dirty="0">
                 <a:cs typeface="Times New Roman"/>
               </a:rPr>
               <a:t>con</a:t>
             </a:r>
             <a:r>
-              <a:rPr spc="-4" dirty="0">
+              <a:rPr sz="2000" spc="-4" dirty="0">
                 <a:cs typeface="Times New Roman"/>
               </a:rPr>
               <a:t>t</a:t>
             </a:r>
             <a:r>
-              <a:rPr spc="-8" dirty="0">
+              <a:rPr sz="2000" spc="-8" dirty="0">
                 <a:cs typeface="Times New Roman"/>
               </a:rPr>
               <a:t>rol d</a:t>
             </a:r>
             <a:r>
-              <a:rPr spc="-11" dirty="0">
+              <a:rPr sz="2000" spc="-11" dirty="0">
                 <a:cs typeface="Times New Roman"/>
               </a:rPr>
               <a:t>e</a:t>
             </a:r>
             <a:r>
-              <a:rPr spc="-8" dirty="0">
-                <a:cs typeface="Times New Roman"/>
-              </a:rPr>
-              <a:t> </a:t>
-            </a:r>
-            <a:r>
-              <a:rPr spc="-8" dirty="0" err="1">
+              <a:rPr sz="2000" spc="-8" dirty="0">
+                <a:cs typeface="Times New Roman"/>
+              </a:rPr>
+              <a:t> </a:t>
+            </a:r>
+            <a:r>
+              <a:rPr sz="2000" spc="-8" dirty="0" err="1">
                 <a:cs typeface="Times New Roman"/>
               </a:rPr>
               <a:t>fl</a:t>
             </a:r>
             <a:r>
-              <a:rPr spc="-4" dirty="0" err="1">
+              <a:rPr sz="2000" spc="-4" dirty="0" err="1">
                 <a:cs typeface="Times New Roman"/>
               </a:rPr>
               <a:t>u</a:t>
             </a:r>
             <a:r>
-              <a:rPr spc="-11" dirty="0" err="1">
+              <a:rPr sz="2000" spc="-11" dirty="0" err="1">
                 <a:cs typeface="Times New Roman"/>
               </a:rPr>
               <a:t>jo</a:t>
             </a:r>
             <a:r>
-              <a:rPr lang="es-ES" spc="-11" dirty="0">
+              <a:rPr lang="es-ES" sz="2000" spc="-11" dirty="0">
                 <a:cs typeface="Times New Roman"/>
               </a:rPr>
               <a:t>.</a:t>
             </a:r>
-            <a:endParaRPr dirty="0">
+            <a:endParaRPr sz="2000" dirty="0">
               <a:cs typeface="Times New Roman"/>
             </a:endParaRPr>
           </a:p>
@@ -13022,108 +11137,108 @@
               <a:buChar char="•"/>
             </a:pPr>
             <a:r>
-              <a:rPr lang="es-ES" spc="-15" dirty="0">
+              <a:rPr lang="es-ES" sz="2000" spc="-15" dirty="0">
                 <a:cs typeface="Times New Roman"/>
               </a:rPr>
               <a:t>Establecer</a:t>
             </a:r>
             <a:r>
-              <a:rPr spc="-8" dirty="0">
-                <a:cs typeface="Times New Roman"/>
-              </a:rPr>
-              <a:t> </a:t>
-            </a:r>
-            <a:r>
-              <a:rPr spc="-11" dirty="0">
+              <a:rPr sz="2000" spc="-8" dirty="0">
+                <a:cs typeface="Times New Roman"/>
+              </a:rPr>
+              <a:t> </a:t>
+            </a:r>
+            <a:r>
+              <a:rPr sz="2000" spc="-11" dirty="0">
                 <a:cs typeface="Times New Roman"/>
               </a:rPr>
               <a:t>con</a:t>
             </a:r>
             <a:r>
-              <a:rPr spc="-4" dirty="0">
+              <a:rPr sz="2000" spc="-4" dirty="0">
                 <a:cs typeface="Times New Roman"/>
               </a:rPr>
               <a:t>t</a:t>
             </a:r>
             <a:r>
-              <a:rPr spc="-8" dirty="0">
+              <a:rPr sz="2000" spc="-8" dirty="0">
                 <a:cs typeface="Times New Roman"/>
               </a:rPr>
               <a:t>ro</a:t>
             </a:r>
             <a:r>
-              <a:rPr spc="-11" dirty="0">
+              <a:rPr sz="2000" spc="-11" dirty="0">
                 <a:cs typeface="Times New Roman"/>
               </a:rPr>
               <a:t>les</a:t>
             </a:r>
             <a:r>
-              <a:rPr spc="-8" dirty="0">
-                <a:cs typeface="Times New Roman"/>
-              </a:rPr>
-              <a:t> </a:t>
-            </a:r>
-            <a:r>
-              <a:rPr spc="-11" dirty="0">
+              <a:rPr sz="2000" spc="-8" dirty="0">
+                <a:cs typeface="Times New Roman"/>
+              </a:rPr>
+              <a:t> </a:t>
+            </a:r>
+            <a:r>
+              <a:rPr sz="2000" spc="-11" dirty="0">
                 <a:cs typeface="Times New Roman"/>
               </a:rPr>
               <a:t>básicos</a:t>
             </a:r>
             <a:r>
-              <a:rPr spc="-4" dirty="0">
-                <a:cs typeface="Times New Roman"/>
-              </a:rPr>
-              <a:t> </a:t>
-            </a:r>
-            <a:r>
-              <a:rPr spc="-8" dirty="0">
+              <a:rPr sz="2000" spc="-4" dirty="0">
+                <a:cs typeface="Times New Roman"/>
+              </a:rPr>
+              <a:t> </a:t>
+            </a:r>
+            <a:r>
+              <a:rPr sz="2000" spc="-8" dirty="0">
                 <a:cs typeface="Times New Roman"/>
               </a:rPr>
               <a:t>d</a:t>
             </a:r>
             <a:r>
-              <a:rPr spc="-11" dirty="0">
+              <a:rPr sz="2000" spc="-11" dirty="0">
                 <a:cs typeface="Times New Roman"/>
               </a:rPr>
               <a:t>e</a:t>
             </a:r>
             <a:r>
-              <a:rPr spc="-8" dirty="0">
-                <a:cs typeface="Times New Roman"/>
-              </a:rPr>
-              <a:t> </a:t>
-            </a:r>
-            <a:r>
-              <a:rPr spc="-11" dirty="0" err="1">
+              <a:rPr sz="2000" spc="-8" dirty="0">
+                <a:cs typeface="Times New Roman"/>
+              </a:rPr>
+              <a:t> </a:t>
+            </a:r>
+            <a:r>
+              <a:rPr sz="2000" spc="-11" dirty="0" err="1">
                 <a:cs typeface="Times New Roman"/>
               </a:rPr>
               <a:t>seg</a:t>
             </a:r>
             <a:r>
-              <a:rPr spc="-8" dirty="0" err="1">
+              <a:rPr sz="2000" spc="-8" dirty="0" err="1">
                 <a:cs typeface="Times New Roman"/>
               </a:rPr>
               <a:t>uri</a:t>
             </a:r>
             <a:r>
-              <a:rPr spc="-4" dirty="0" err="1">
+              <a:rPr sz="2000" spc="-4" dirty="0" err="1">
                 <a:cs typeface="Times New Roman"/>
               </a:rPr>
               <a:t>d</a:t>
             </a:r>
             <a:r>
-              <a:rPr spc="-11" dirty="0" err="1">
+              <a:rPr sz="2000" spc="-11" dirty="0" err="1">
                 <a:cs typeface="Times New Roman"/>
               </a:rPr>
               <a:t>ad</a:t>
             </a:r>
             <a:r>
-              <a:rPr lang="es-ES" spc="-11" dirty="0">
+              <a:rPr lang="es-ES" sz="2000" spc="-11" dirty="0">
                 <a:cs typeface="Times New Roman"/>
               </a:rPr>
               <a:t>.</a:t>
             </a:r>
-            <a:endParaRPr dirty="0">
+            <a:endParaRPr sz="2000" dirty="0">
               <a:cs typeface="Times New Roman"/>
             </a:endParaRPr>
           </a:p>
@@ -13139,114 +11254,114 @@
               <a:buChar char="•"/>
             </a:pPr>
             <a:r>
-              <a:rPr spc="-11" dirty="0" err="1">
+              <a:rPr sz="2000" spc="-11" dirty="0" err="1">
                 <a:cs typeface="Times New Roman"/>
               </a:rPr>
               <a:t>Blo</a:t>
             </a:r>
             <a:r>
-              <a:rPr spc="-8" dirty="0" err="1">
+              <a:rPr sz="2000" spc="-8" dirty="0" err="1">
                 <a:cs typeface="Times New Roman"/>
               </a:rPr>
               <a:t>q</a:t>
             </a:r>
             <a:r>
-              <a:rPr spc="-11" dirty="0" err="1">
+              <a:rPr sz="2000" spc="-11" dirty="0" err="1">
                 <a:cs typeface="Times New Roman"/>
               </a:rPr>
               <a:t>uear</a:t>
             </a:r>
             <a:r>
-              <a:rPr spc="-8" dirty="0">
-                <a:cs typeface="Times New Roman"/>
-              </a:rPr>
-              <a:t> </a:t>
-            </a:r>
-            <a:r>
-              <a:rPr spc="-11" dirty="0">
+              <a:rPr sz="2000" spc="-8" dirty="0">
+                <a:cs typeface="Times New Roman"/>
+              </a:rPr>
+              <a:t> </a:t>
+            </a:r>
+            <a:r>
+              <a:rPr sz="2000" spc="-11" dirty="0">
                 <a:cs typeface="Times New Roman"/>
               </a:rPr>
               <a:t>alg</a:t>
             </a:r>
             <a:r>
-              <a:rPr spc="-8" dirty="0">
+              <a:rPr sz="2000" spc="-8" dirty="0">
                 <a:cs typeface="Times New Roman"/>
               </a:rPr>
               <a:t>ú</a:t>
             </a:r>
             <a:r>
-              <a:rPr spc="-11" dirty="0">
+              <a:rPr sz="2000" spc="-11" dirty="0">
                 <a:cs typeface="Times New Roman"/>
               </a:rPr>
               <a:t>n</a:t>
             </a:r>
             <a:r>
-              <a:rPr spc="4" dirty="0">
-                <a:cs typeface="Times New Roman"/>
-              </a:rPr>
-              <a:t> </a:t>
-            </a:r>
-            <a:r>
-              <a:rPr spc="-8" dirty="0">
+              <a:rPr sz="2000" spc="4" dirty="0">
+                <a:cs typeface="Times New Roman"/>
+              </a:rPr>
+              <a:t> </a:t>
+            </a:r>
+            <a:r>
+              <a:rPr sz="2000" spc="-8" dirty="0">
                 <a:cs typeface="Times New Roman"/>
               </a:rPr>
               <a:t>tip</a:t>
             </a:r>
             <a:r>
-              <a:rPr spc="-11" dirty="0">
+              <a:rPr sz="2000" spc="-11" dirty="0">
                 <a:cs typeface="Times New Roman"/>
               </a:rPr>
               <a:t>o</a:t>
             </a:r>
             <a:r>
-              <a:rPr spc="-15" dirty="0">
-                <a:cs typeface="Times New Roman"/>
-              </a:rPr>
-              <a:t> </a:t>
-            </a:r>
-            <a:r>
-              <a:rPr spc="-8" dirty="0">
+              <a:rPr sz="2000" spc="-15" dirty="0">
+                <a:cs typeface="Times New Roman"/>
+              </a:rPr>
+              <a:t> </a:t>
+            </a:r>
+            <a:r>
+              <a:rPr sz="2000" spc="-8" dirty="0">
                 <a:cs typeface="Times New Roman"/>
               </a:rPr>
               <a:t>d</a:t>
             </a:r>
             <a:r>
-              <a:rPr spc="-11" dirty="0">
+              <a:rPr sz="2000" spc="-11" dirty="0">
                 <a:cs typeface="Times New Roman"/>
               </a:rPr>
               <a:t>e</a:t>
             </a:r>
             <a:r>
-              <a:rPr dirty="0">
-                <a:cs typeface="Times New Roman"/>
-              </a:rPr>
-              <a:t> </a:t>
-            </a:r>
-            <a:r>
-              <a:rPr spc="-8" dirty="0" err="1">
+              <a:rPr sz="2000" dirty="0">
+                <a:cs typeface="Times New Roman"/>
+              </a:rPr>
+              <a:t> </a:t>
+            </a:r>
+            <a:r>
+              <a:rPr sz="2000" spc="-8" dirty="0" err="1">
                 <a:cs typeface="Times New Roman"/>
               </a:rPr>
               <a:t>tráf</a:t>
             </a:r>
             <a:r>
-              <a:rPr spc="-4" dirty="0" err="1">
+              <a:rPr sz="2000" spc="-4" dirty="0" err="1">
                 <a:cs typeface="Times New Roman"/>
               </a:rPr>
               <a:t>i</a:t>
             </a:r>
             <a:r>
-              <a:rPr spc="-11" dirty="0" err="1">
+              <a:rPr sz="2000" spc="-11" dirty="0" err="1">
                 <a:cs typeface="Times New Roman"/>
               </a:rPr>
               <a:t>co</a:t>
             </a:r>
             <a:r>
-              <a:rPr lang="es-ES" spc="-11" dirty="0">
+              <a:rPr lang="es-ES" sz="2000" spc="-11" dirty="0">
                 <a:cs typeface="Times New Roman"/>
               </a:rPr>
               <a:t>.</a:t>
             </a:r>
-            <a:endParaRPr dirty="0">
+            <a:endParaRPr sz="2000" dirty="0">
               <a:cs typeface="Times New Roman"/>
             </a:endParaRPr>
           </a:p>
@@ -17731,13 +15846,13 @@
       </p:grpSpPr>
       <p:sp>
         <p:nvSpPr>
-          <p:cNvPr id="3" name="object 3"/>
+          <p:cNvPr id="2" name="object 2"/>
           <p:cNvSpPr txBox="1"/>
           <p:nvPr/>
         </p:nvSpPr>
         <p:spPr>
           <a:xfrm>
-            <a:off x="1657350" y="1828801"/>
+            <a:off x="1657350" y="1714501"/>
             <a:ext cx="5657850" cy="646331"/>
           </a:xfrm>
           <a:prstGeom prst="rect">
@@ -17922,7 +16037,7 @@
               </a:rPr>
               <a:t>acceso</a:t>
             </a:r>
-            <a:endParaRPr sz="2100" dirty="0">
+            <a:endParaRPr sz="2100">
               <a:latin typeface="Arial Narrow"/>
               <a:cs typeface="Arial Narrow"/>
             </a:endParaRPr>
@@ -17934,14 +16049,14 @@
                 <a:latin typeface="Arial Narrow"/>
                 <a:cs typeface="Arial Narrow"/>
               </a:rPr>
-              <a:t>estánda</a:t>
-            </a:r>
-            <a:r>
-              <a:rPr sz="2100" b="1" spc="-19" dirty="0">
+              <a:t>extendida</a:t>
+            </a:r>
+            <a:r>
+              <a:rPr sz="2100" b="1" spc="-23" dirty="0">
                 <a:latin typeface="Arial Narrow"/>
                 <a:cs typeface="Arial Narrow"/>
               </a:rPr>
-              <a:t>r</a:t>
+              <a:t>s</a:t>
             </a:r>
             <a:r>
               <a:rPr sz="2100" b="1" spc="-8" dirty="0">
@@ -17950,7 +16065,7 @@
               </a:rPr>
               <a:t>:</a:t>
             </a:r>
-            <a:endParaRPr sz="2100" dirty="0">
+            <a:endParaRPr sz="2100">
               <a:latin typeface="Arial Narrow"/>
               <a:cs typeface="Arial Narrow"/>
             </a:endParaRPr>
@@ -17959,14 +16074,14 @@
       </p:sp>
       <p:sp>
         <p:nvSpPr>
-          <p:cNvPr id="4" name="object 4"/>
+          <p:cNvPr id="3" name="object 3"/>
           <p:cNvSpPr txBox="1"/>
           <p:nvPr/>
         </p:nvSpPr>
         <p:spPr>
           <a:xfrm>
-            <a:off x="1667732" y="2751382"/>
-            <a:ext cx="5917882" cy="300082"/>
+            <a:off x="1716596" y="2577487"/>
+            <a:ext cx="5653563" cy="2702022"/>
           </a:xfrm>
           <a:prstGeom prst="rect">
             <a:avLst/>
@@ -17978,210 +16093,945 @@
           </a:bodyPr>
           <a:lstStyle/>
           <a:p>
-            <a:pPr marL="9525">
+            <a:pPr marL="123825" marR="3810" algn="just"/>
+            <a:r>
+              <a:rPr b="1" spc="-4" dirty="0">
+                <a:latin typeface="Arial Narrow"/>
+                <a:cs typeface="Arial Narrow"/>
+              </a:rPr>
+              <a:t>a</a:t>
+            </a:r>
+            <a:r>
+              <a:rPr b="1" dirty="0">
+                <a:latin typeface="Arial Narrow"/>
+                <a:cs typeface="Arial Narrow"/>
+              </a:rPr>
+              <a:t>c</a:t>
+            </a:r>
+            <a:r>
+              <a:rPr b="1" spc="4" dirty="0">
+                <a:latin typeface="Arial Narrow"/>
+                <a:cs typeface="Arial Narrow"/>
+              </a:rPr>
+              <a:t>c</a:t>
+            </a:r>
+            <a:r>
+              <a:rPr b="1" spc="-4" dirty="0">
+                <a:latin typeface="Arial Narrow"/>
+                <a:cs typeface="Arial Narrow"/>
+              </a:rPr>
+              <a:t>e</a:t>
+            </a:r>
+            <a:r>
+              <a:rPr b="1" dirty="0">
+                <a:latin typeface="Arial Narrow"/>
+                <a:cs typeface="Arial Narrow"/>
+              </a:rPr>
+              <a:t>ss</a:t>
+            </a:r>
+            <a:r>
+              <a:rPr b="1" spc="-4" dirty="0">
+                <a:latin typeface="Arial Narrow"/>
+                <a:cs typeface="Arial Narrow"/>
+              </a:rPr>
+              <a:t>-</a:t>
+            </a:r>
+            <a:r>
+              <a:rPr b="1" dirty="0">
+                <a:latin typeface="Arial Narrow"/>
+                <a:cs typeface="Arial Narrow"/>
+              </a:rPr>
+              <a:t>l</a:t>
+            </a:r>
+            <a:r>
+              <a:rPr b="1" spc="4" dirty="0">
+                <a:latin typeface="Arial Narrow"/>
+                <a:cs typeface="Arial Narrow"/>
+              </a:rPr>
+              <a:t>i</a:t>
+            </a:r>
+            <a:r>
+              <a:rPr b="1" spc="-4" dirty="0">
+                <a:latin typeface="Arial Narrow"/>
+                <a:cs typeface="Arial Narrow"/>
+              </a:rPr>
+              <a:t>s</a:t>
+            </a:r>
+            <a:r>
+              <a:rPr b="1" dirty="0">
+                <a:latin typeface="Arial Narrow"/>
+                <a:cs typeface="Arial Narrow"/>
+              </a:rPr>
+              <a:t>t </a:t>
+            </a:r>
+            <a:r>
+              <a:rPr b="1" spc="109" dirty="0">
+                <a:latin typeface="Arial Narrow"/>
+                <a:cs typeface="Arial Narrow"/>
+              </a:rPr>
+              <a:t> </a:t>
+            </a:r>
+            <a:r>
+              <a:rPr b="1" spc="-11" dirty="0">
+                <a:solidFill>
+                  <a:srgbClr val="3333CC"/>
+                </a:solidFill>
+                <a:latin typeface="Arial Narrow"/>
+                <a:cs typeface="Arial Narrow"/>
+              </a:rPr>
+              <a:t>núme</a:t>
+            </a:r>
+            <a:r>
+              <a:rPr b="1" spc="-4" dirty="0">
+                <a:solidFill>
+                  <a:srgbClr val="3333CC"/>
+                </a:solidFill>
+                <a:latin typeface="Arial Narrow"/>
+                <a:cs typeface="Arial Narrow"/>
+              </a:rPr>
+              <a:t>r</a:t>
+            </a:r>
+            <a:r>
+              <a:rPr b="1" dirty="0">
+                <a:solidFill>
+                  <a:srgbClr val="3333CC"/>
+                </a:solidFill>
+                <a:latin typeface="Arial Narrow"/>
+                <a:cs typeface="Arial Narrow"/>
+              </a:rPr>
+              <a:t>o_l</a:t>
+            </a:r>
+            <a:r>
+              <a:rPr b="1" spc="4" dirty="0">
+                <a:solidFill>
+                  <a:srgbClr val="3333CC"/>
+                </a:solidFill>
+                <a:latin typeface="Arial Narrow"/>
+                <a:cs typeface="Arial Narrow"/>
+              </a:rPr>
+              <a:t>i</a:t>
+            </a:r>
+            <a:r>
+              <a:rPr b="1" spc="-4" dirty="0">
+                <a:solidFill>
+                  <a:srgbClr val="3333CC"/>
+                </a:solidFill>
+                <a:latin typeface="Arial Narrow"/>
+                <a:cs typeface="Arial Narrow"/>
+              </a:rPr>
+              <a:t>st</a:t>
+            </a:r>
+            <a:r>
+              <a:rPr b="1" dirty="0">
+                <a:solidFill>
+                  <a:srgbClr val="3333CC"/>
+                </a:solidFill>
+                <a:latin typeface="Arial Narrow"/>
+                <a:cs typeface="Arial Narrow"/>
+              </a:rPr>
+              <a:t>a</a:t>
+            </a:r>
+            <a:r>
+              <a:rPr b="1" spc="60" dirty="0">
+                <a:solidFill>
+                  <a:srgbClr val="3333CC"/>
+                </a:solidFill>
+                <a:latin typeface="Arial Narrow"/>
+                <a:cs typeface="Arial Narrow"/>
+              </a:rPr>
+              <a:t> </a:t>
+            </a:r>
+            <a:r>
+              <a:rPr b="1" spc="-8" dirty="0">
+                <a:latin typeface="Arial Narrow"/>
+                <a:cs typeface="Arial Narrow"/>
+              </a:rPr>
+              <a:t>{</a:t>
+            </a:r>
+            <a:r>
+              <a:rPr b="1" spc="-11" dirty="0">
+                <a:solidFill>
+                  <a:srgbClr val="009900"/>
+                </a:solidFill>
+                <a:latin typeface="Arial Narrow"/>
+                <a:cs typeface="Arial Narrow"/>
+              </a:rPr>
+              <a:t>perm</a:t>
+            </a:r>
+            <a:r>
+              <a:rPr b="1" spc="-15" dirty="0">
+                <a:solidFill>
+                  <a:srgbClr val="009900"/>
+                </a:solidFill>
+                <a:latin typeface="Arial Narrow"/>
+                <a:cs typeface="Arial Narrow"/>
+              </a:rPr>
+              <a:t>i</a:t>
+            </a:r>
+            <a:r>
+              <a:rPr b="1" spc="-8" dirty="0">
+                <a:solidFill>
+                  <a:srgbClr val="009900"/>
+                </a:solidFill>
+                <a:latin typeface="Arial Narrow"/>
+                <a:cs typeface="Arial Narrow"/>
+              </a:rPr>
+              <a:t>t</a:t>
+            </a:r>
+            <a:r>
+              <a:rPr b="1" spc="60" dirty="0">
+                <a:solidFill>
+                  <a:srgbClr val="009900"/>
+                </a:solidFill>
+                <a:latin typeface="Arial Narrow"/>
+                <a:cs typeface="Arial Narrow"/>
+              </a:rPr>
+              <a:t> </a:t>
+            </a:r>
+            <a:r>
+              <a:rPr b="1" spc="-8" dirty="0">
+                <a:latin typeface="Arial Narrow"/>
+                <a:cs typeface="Arial Narrow"/>
+              </a:rPr>
+              <a:t>|</a:t>
+            </a:r>
+            <a:r>
+              <a:rPr b="1" spc="56" dirty="0">
+                <a:latin typeface="Arial Narrow"/>
+                <a:cs typeface="Arial Narrow"/>
+              </a:rPr>
+              <a:t> </a:t>
+            </a:r>
+            <a:r>
+              <a:rPr b="1" dirty="0">
+                <a:solidFill>
+                  <a:srgbClr val="FF3300"/>
+                </a:solidFill>
+                <a:latin typeface="Arial Narrow"/>
+                <a:cs typeface="Arial Narrow"/>
+              </a:rPr>
+              <a:t>den</a:t>
+            </a:r>
+            <a:r>
+              <a:rPr b="1" spc="-8" dirty="0">
+                <a:solidFill>
+                  <a:srgbClr val="FF3300"/>
+                </a:solidFill>
+                <a:latin typeface="Arial Narrow"/>
+                <a:cs typeface="Arial Narrow"/>
+              </a:rPr>
+              <a:t>y</a:t>
+            </a:r>
+            <a:r>
+              <a:rPr b="1" spc="-8" dirty="0">
+                <a:latin typeface="Arial Narrow"/>
+                <a:cs typeface="Arial Narrow"/>
+              </a:rPr>
+              <a:t>}</a:t>
+            </a:r>
+            <a:r>
+              <a:rPr b="1" dirty="0">
+                <a:latin typeface="Arial Narrow"/>
+                <a:cs typeface="Arial Narrow"/>
+              </a:rPr>
+              <a:t> </a:t>
+            </a:r>
+            <a:r>
+              <a:rPr b="1" spc="116" dirty="0">
+                <a:latin typeface="Arial Narrow"/>
+                <a:cs typeface="Arial Narrow"/>
+              </a:rPr>
+              <a:t> </a:t>
+            </a:r>
+            <a:r>
+              <a:rPr b="1" spc="-11" dirty="0">
+                <a:latin typeface="Arial Narrow"/>
+                <a:cs typeface="Arial Narrow"/>
+              </a:rPr>
+              <a:t>protoco</a:t>
+            </a:r>
+            <a:r>
+              <a:rPr b="1" spc="-19" dirty="0">
+                <a:latin typeface="Arial Narrow"/>
+                <a:cs typeface="Arial Narrow"/>
+              </a:rPr>
+              <a:t>l</a:t>
+            </a:r>
+            <a:r>
+              <a:rPr b="1" spc="-11" dirty="0">
+                <a:latin typeface="Arial Narrow"/>
+                <a:cs typeface="Arial Narrow"/>
+              </a:rPr>
+              <a:t>o</a:t>
+            </a:r>
+            <a:r>
+              <a:rPr b="1" spc="53" dirty="0">
+                <a:latin typeface="Arial Narrow"/>
+                <a:cs typeface="Arial Narrow"/>
+              </a:rPr>
+              <a:t> </a:t>
+            </a:r>
+            <a:r>
+              <a:rPr b="1" spc="-8" dirty="0">
+                <a:solidFill>
+                  <a:srgbClr val="3333CC"/>
+                </a:solidFill>
+                <a:latin typeface="Arial Narrow"/>
+                <a:cs typeface="Arial Narrow"/>
+              </a:rPr>
+              <a:t>ip_origen </a:t>
+            </a:r>
+            <a:r>
+              <a:rPr b="1" spc="-4" dirty="0">
+                <a:solidFill>
+                  <a:srgbClr val="3333CC"/>
+                </a:solidFill>
+                <a:latin typeface="Arial Narrow"/>
+                <a:cs typeface="Arial Narrow"/>
+              </a:rPr>
+              <a:t>w</a:t>
+            </a:r>
+            <a:r>
+              <a:rPr b="1" spc="4" dirty="0">
+                <a:solidFill>
+                  <a:srgbClr val="3333CC"/>
+                </a:solidFill>
+                <a:latin typeface="Arial Narrow"/>
+                <a:cs typeface="Arial Narrow"/>
+              </a:rPr>
+              <a:t>i</a:t>
+            </a:r>
+            <a:r>
+              <a:rPr b="1" spc="-8" dirty="0">
+                <a:solidFill>
+                  <a:srgbClr val="3333CC"/>
+                </a:solidFill>
+                <a:latin typeface="Arial Narrow"/>
+                <a:cs typeface="Arial Narrow"/>
+              </a:rPr>
+              <a:t>ldcard_</a:t>
+            </a:r>
+            <a:r>
+              <a:rPr b="1" spc="-19" dirty="0">
+                <a:solidFill>
+                  <a:srgbClr val="3333CC"/>
+                </a:solidFill>
+                <a:latin typeface="Arial Narrow"/>
+                <a:cs typeface="Arial Narrow"/>
+              </a:rPr>
+              <a:t>o</a:t>
+            </a:r>
+            <a:r>
+              <a:rPr b="1" spc="-8" dirty="0">
+                <a:solidFill>
+                  <a:srgbClr val="3333CC"/>
+                </a:solidFill>
+                <a:latin typeface="Arial Narrow"/>
+                <a:cs typeface="Arial Narrow"/>
+              </a:rPr>
+              <a:t>r</a:t>
+            </a:r>
+            <a:r>
+              <a:rPr b="1" dirty="0">
+                <a:solidFill>
+                  <a:srgbClr val="3333CC"/>
+                </a:solidFill>
+                <a:latin typeface="Arial Narrow"/>
+                <a:cs typeface="Arial Narrow"/>
+              </a:rPr>
+              <a:t>igen    </a:t>
+            </a:r>
+            <a:r>
+              <a:rPr b="1" spc="-75" dirty="0">
+                <a:solidFill>
+                  <a:srgbClr val="3333CC"/>
+                </a:solidFill>
+                <a:latin typeface="Arial Narrow"/>
+                <a:cs typeface="Arial Narrow"/>
+              </a:rPr>
+              <a:t> </a:t>
+            </a:r>
+            <a:r>
+              <a:rPr b="1" dirty="0">
+                <a:solidFill>
+                  <a:srgbClr val="3333CC"/>
+                </a:solidFill>
+                <a:latin typeface="Arial Narrow"/>
+                <a:cs typeface="Arial Narrow"/>
+              </a:rPr>
+              <a:t>ip_</a:t>
+            </a:r>
+            <a:r>
+              <a:rPr b="1" spc="4" dirty="0">
+                <a:solidFill>
+                  <a:srgbClr val="3333CC"/>
+                </a:solidFill>
+                <a:latin typeface="Arial Narrow"/>
+                <a:cs typeface="Arial Narrow"/>
+              </a:rPr>
+              <a:t>de</a:t>
+            </a:r>
+            <a:r>
+              <a:rPr b="1" spc="-4" dirty="0">
+                <a:solidFill>
+                  <a:srgbClr val="3333CC"/>
+                </a:solidFill>
+                <a:latin typeface="Arial Narrow"/>
+                <a:cs typeface="Arial Narrow"/>
+              </a:rPr>
+              <a:t>st</a:t>
+            </a:r>
+            <a:r>
+              <a:rPr b="1" spc="4" dirty="0">
+                <a:solidFill>
+                  <a:srgbClr val="3333CC"/>
+                </a:solidFill>
+                <a:latin typeface="Arial Narrow"/>
+                <a:cs typeface="Arial Narrow"/>
+              </a:rPr>
+              <a:t>i</a:t>
+            </a:r>
+            <a:r>
+              <a:rPr b="1" spc="-11" dirty="0">
+                <a:solidFill>
+                  <a:srgbClr val="3333CC"/>
+                </a:solidFill>
+                <a:latin typeface="Arial Narrow"/>
+                <a:cs typeface="Arial Narrow"/>
+              </a:rPr>
+              <a:t>no</a:t>
+            </a:r>
+            <a:r>
+              <a:rPr b="1" dirty="0">
+                <a:solidFill>
+                  <a:srgbClr val="3333CC"/>
+                </a:solidFill>
+                <a:latin typeface="Arial Narrow"/>
+                <a:cs typeface="Arial Narrow"/>
+              </a:rPr>
+              <a:t>    </a:t>
+            </a:r>
+            <a:r>
+              <a:rPr b="1" spc="-71" dirty="0">
+                <a:solidFill>
+                  <a:srgbClr val="3333CC"/>
+                </a:solidFill>
+                <a:latin typeface="Arial Narrow"/>
+                <a:cs typeface="Arial Narrow"/>
+              </a:rPr>
+              <a:t> </a:t>
+            </a:r>
+            <a:r>
+              <a:rPr b="1" spc="-4" dirty="0">
+                <a:solidFill>
+                  <a:srgbClr val="3333CC"/>
+                </a:solidFill>
+                <a:latin typeface="Arial Narrow"/>
+                <a:cs typeface="Arial Narrow"/>
+              </a:rPr>
+              <a:t>w</a:t>
+            </a:r>
+            <a:r>
+              <a:rPr b="1" spc="4" dirty="0">
+                <a:solidFill>
+                  <a:srgbClr val="3333CC"/>
+                </a:solidFill>
+                <a:latin typeface="Arial Narrow"/>
+                <a:cs typeface="Arial Narrow"/>
+              </a:rPr>
+              <a:t>i</a:t>
+            </a:r>
+            <a:r>
+              <a:rPr b="1" dirty="0">
+                <a:solidFill>
+                  <a:srgbClr val="3333CC"/>
+                </a:solidFill>
+                <a:latin typeface="Arial Narrow"/>
+                <a:cs typeface="Arial Narrow"/>
+              </a:rPr>
+              <a:t>ldcard_dest</a:t>
+            </a:r>
+            <a:r>
+              <a:rPr b="1" spc="4" dirty="0">
+                <a:solidFill>
+                  <a:srgbClr val="3333CC"/>
+                </a:solidFill>
+                <a:latin typeface="Arial Narrow"/>
+                <a:cs typeface="Arial Narrow"/>
+              </a:rPr>
+              <a:t>i</a:t>
+            </a:r>
+            <a:r>
+              <a:rPr b="1" spc="-11" dirty="0">
+                <a:solidFill>
+                  <a:srgbClr val="3333CC"/>
+                </a:solidFill>
+                <a:latin typeface="Arial Narrow"/>
+                <a:cs typeface="Arial Narrow"/>
+              </a:rPr>
+              <a:t>no</a:t>
+            </a:r>
+            <a:r>
+              <a:rPr b="1" dirty="0">
+                <a:solidFill>
+                  <a:srgbClr val="3333CC"/>
+                </a:solidFill>
+                <a:latin typeface="Arial Narrow"/>
+                <a:cs typeface="Arial Narrow"/>
+              </a:rPr>
+              <a:t>    </a:t>
+            </a:r>
+            <a:r>
+              <a:rPr b="1" spc="-71" dirty="0">
+                <a:solidFill>
+                  <a:srgbClr val="3333CC"/>
+                </a:solidFill>
+                <a:latin typeface="Arial Narrow"/>
+                <a:cs typeface="Arial Narrow"/>
+              </a:rPr>
+              <a:t> </a:t>
+            </a:r>
+            <a:r>
+              <a:rPr b="1" spc="-11" dirty="0">
+                <a:latin typeface="Arial Narrow"/>
+                <a:cs typeface="Arial Narrow"/>
+              </a:rPr>
+              <a:t>oper</a:t>
+            </a:r>
+            <a:r>
+              <a:rPr b="1" spc="-19" dirty="0">
+                <a:latin typeface="Arial Narrow"/>
+                <a:cs typeface="Arial Narrow"/>
+              </a:rPr>
+              <a:t>a</a:t>
+            </a:r>
+            <a:r>
+              <a:rPr b="1" spc="-11" dirty="0">
+                <a:latin typeface="Arial Narrow"/>
+                <a:cs typeface="Arial Narrow"/>
+              </a:rPr>
+              <a:t>ndo</a:t>
+            </a:r>
+            <a:r>
+              <a:rPr b="1" spc="-8" dirty="0">
+                <a:latin typeface="Arial Narrow"/>
+                <a:cs typeface="Arial Narrow"/>
+              </a:rPr>
+              <a:t> </a:t>
+            </a:r>
+            <a:r>
+              <a:rPr b="1" spc="-11" dirty="0">
+                <a:solidFill>
+                  <a:srgbClr val="3333CC"/>
+                </a:solidFill>
+                <a:latin typeface="Arial Narrow"/>
+                <a:cs typeface="Arial Narrow"/>
+              </a:rPr>
+              <a:t>número</a:t>
+            </a:r>
+            <a:r>
+              <a:rPr b="1" spc="-19" dirty="0">
+                <a:solidFill>
+                  <a:srgbClr val="3333CC"/>
+                </a:solidFill>
+                <a:latin typeface="Arial Narrow"/>
+                <a:cs typeface="Arial Narrow"/>
+              </a:rPr>
+              <a:t>_</a:t>
+            </a:r>
+            <a:r>
+              <a:rPr b="1" spc="-11" dirty="0">
+                <a:solidFill>
+                  <a:srgbClr val="3333CC"/>
+                </a:solidFill>
+                <a:latin typeface="Arial Narrow"/>
+                <a:cs typeface="Arial Narrow"/>
+              </a:rPr>
+              <a:t>puerto</a:t>
+            </a:r>
+            <a:endParaRPr dirty="0">
+              <a:latin typeface="Arial Narrow"/>
+              <a:cs typeface="Arial Narrow"/>
+            </a:endParaRPr>
+          </a:p>
+          <a:p>
+            <a:pPr>
+              <a:spcBef>
+                <a:spcPts val="8"/>
+              </a:spcBef>
+            </a:pPr>
+            <a:endParaRPr sz="2175" dirty="0">
+              <a:latin typeface="Times New Roman"/>
+              <a:cs typeface="Times New Roman"/>
+            </a:endParaRPr>
+          </a:p>
+          <a:p>
+            <a:pPr marL="9525" marR="117634">
               <a:tabLst>
-                <a:tab pos="1160621" algn="l"/>
-                <a:tab pos="5083493" algn="l"/>
+                <a:tab pos="1295400" algn="l"/>
+                <a:tab pos="1657826" algn="l"/>
+                <a:tab pos="1946910" algn="l"/>
+                <a:tab pos="2492216" algn="l"/>
+                <a:tab pos="2854643" algn="l"/>
+                <a:tab pos="3701415" algn="l"/>
+                <a:tab pos="4063841" algn="l"/>
+                <a:tab pos="4912043" algn="l"/>
+                <a:tab pos="5140643" algn="l"/>
               </a:tabLst>
             </a:pPr>
             <a:r>
-              <a:rPr sz="1950" b="1" dirty="0">
+              <a:rPr sz="2100" b="1" spc="-11" dirty="0">
                 <a:latin typeface="Arial Narrow"/>
                 <a:cs typeface="Arial Narrow"/>
               </a:rPr>
+              <a:t>Asignación	de	la</a:t>
+            </a:r>
+            <a:r>
+              <a:rPr sz="2100" b="1" dirty="0">
+                <a:latin typeface="Arial Narrow"/>
+                <a:cs typeface="Arial Narrow"/>
+              </a:rPr>
+              <a:t>	</a:t>
+            </a:r>
+            <a:r>
+              <a:rPr sz="2100" b="1" spc="-8" dirty="0">
+                <a:latin typeface="Arial Narrow"/>
+                <a:cs typeface="Arial Narrow"/>
+              </a:rPr>
+              <a:t>lis</a:t>
+            </a:r>
+            <a:r>
+              <a:rPr sz="2100" b="1" spc="-4" dirty="0">
+                <a:latin typeface="Arial Narrow"/>
+                <a:cs typeface="Arial Narrow"/>
+              </a:rPr>
+              <a:t>t</a:t>
+            </a:r>
+            <a:r>
+              <a:rPr sz="2100" b="1" spc="-11" dirty="0">
+                <a:latin typeface="Arial Narrow"/>
+                <a:cs typeface="Arial Narrow"/>
+              </a:rPr>
+              <a:t>a</a:t>
+            </a:r>
+            <a:r>
+              <a:rPr sz="2100" b="1" dirty="0">
+                <a:latin typeface="Arial Narrow"/>
+                <a:cs typeface="Arial Narrow"/>
+              </a:rPr>
+              <a:t>	</a:t>
+            </a:r>
+            <a:r>
+              <a:rPr sz="2100" b="1" spc="-11" dirty="0">
+                <a:latin typeface="Arial Narrow"/>
+                <a:cs typeface="Arial Narrow"/>
+              </a:rPr>
+              <a:t>de</a:t>
+            </a:r>
+            <a:r>
+              <a:rPr sz="2100" b="1" dirty="0">
+                <a:latin typeface="Arial Narrow"/>
+                <a:cs typeface="Arial Narrow"/>
+              </a:rPr>
+              <a:t>	</a:t>
+            </a:r>
+            <a:r>
+              <a:rPr sz="2100" b="1" spc="-15" dirty="0">
+                <a:latin typeface="Arial Narrow"/>
+                <a:cs typeface="Arial Narrow"/>
+              </a:rPr>
+              <a:t>contro</a:t>
+            </a:r>
+            <a:r>
+              <a:rPr sz="2100" b="1" spc="-8" dirty="0">
+                <a:latin typeface="Arial Narrow"/>
+                <a:cs typeface="Arial Narrow"/>
+              </a:rPr>
+              <a:t>l</a:t>
+            </a:r>
+            <a:r>
+              <a:rPr sz="2100" b="1" dirty="0">
+                <a:latin typeface="Arial Narrow"/>
+                <a:cs typeface="Arial Narrow"/>
+              </a:rPr>
+              <a:t>	</a:t>
+            </a:r>
+            <a:r>
+              <a:rPr sz="2100" b="1" spc="-11" dirty="0">
+                <a:latin typeface="Arial Narrow"/>
+                <a:cs typeface="Arial Narrow"/>
+              </a:rPr>
+              <a:t>de</a:t>
+            </a:r>
+            <a:r>
+              <a:rPr sz="2100" b="1" dirty="0">
+                <a:latin typeface="Arial Narrow"/>
+                <a:cs typeface="Arial Narrow"/>
+              </a:rPr>
+              <a:t>	</a:t>
+            </a:r>
+            <a:r>
+              <a:rPr sz="2100" b="1" spc="-15" dirty="0">
+                <a:latin typeface="Arial Narrow"/>
+                <a:cs typeface="Arial Narrow"/>
+              </a:rPr>
+              <a:t>acces</a:t>
+            </a:r>
+            <a:r>
+              <a:rPr sz="2100" b="1" spc="-11" dirty="0">
+                <a:latin typeface="Arial Narrow"/>
+                <a:cs typeface="Arial Narrow"/>
+              </a:rPr>
+              <a:t>o</a:t>
+            </a:r>
+            <a:r>
+              <a:rPr sz="2100" b="1" dirty="0">
+                <a:latin typeface="Arial Narrow"/>
+                <a:cs typeface="Arial Narrow"/>
+              </a:rPr>
+              <a:t>	</a:t>
+            </a:r>
+            <a:r>
+              <a:rPr sz="2100" b="1" spc="-11" dirty="0">
+                <a:latin typeface="Arial Narrow"/>
+                <a:cs typeface="Arial Narrow"/>
+              </a:rPr>
+              <a:t>a</a:t>
+            </a:r>
+            <a:r>
+              <a:rPr sz="2100" b="1" dirty="0">
+                <a:latin typeface="Arial Narrow"/>
+                <a:cs typeface="Arial Narrow"/>
+              </a:rPr>
+              <a:t>	</a:t>
+            </a:r>
+            <a:r>
+              <a:rPr sz="2100" b="1" spc="-11" dirty="0">
+                <a:latin typeface="Arial Narrow"/>
+                <a:cs typeface="Arial Narrow"/>
+              </a:rPr>
+              <a:t>una </a:t>
+            </a:r>
+            <a:r>
+              <a:rPr sz="2100" b="1" spc="-11" dirty="0" err="1">
+                <a:latin typeface="Arial Narrow"/>
+                <a:cs typeface="Arial Narrow"/>
+              </a:rPr>
+              <a:t>interfa</a:t>
+            </a:r>
+            <a:r>
+              <a:rPr lang="es-ES" sz="2100" b="1" spc="-11" dirty="0">
+                <a:latin typeface="Arial Narrow"/>
+                <a:cs typeface="Arial Narrow"/>
+              </a:rPr>
+              <a:t>z</a:t>
+            </a:r>
+            <a:r>
+              <a:rPr sz="2100" b="1" spc="-8" dirty="0">
+                <a:latin typeface="Arial Narrow"/>
+                <a:cs typeface="Arial Narrow"/>
+              </a:rPr>
+              <a:t> </a:t>
+            </a:r>
+            <a:r>
+              <a:rPr sz="2100" b="1" spc="-11" dirty="0">
+                <a:latin typeface="Arial Narrow"/>
+                <a:cs typeface="Arial Narrow"/>
+              </a:rPr>
+              <a:t>del</a:t>
+            </a:r>
+            <a:r>
+              <a:rPr sz="2100" b="1" spc="-4" dirty="0">
+                <a:latin typeface="Arial Narrow"/>
+                <a:cs typeface="Arial Narrow"/>
+              </a:rPr>
+              <a:t> </a:t>
+            </a:r>
+            <a:r>
+              <a:rPr sz="2100" b="1" spc="-11" dirty="0">
+                <a:latin typeface="Arial Narrow"/>
+                <a:cs typeface="Arial Narrow"/>
+              </a:rPr>
+              <a:t>ruteador</a:t>
+            </a:r>
+            <a:r>
+              <a:rPr sz="2100" b="1" spc="-8" dirty="0">
+                <a:latin typeface="Arial Narrow"/>
+                <a:cs typeface="Arial Narrow"/>
+              </a:rPr>
+              <a:t>:</a:t>
+            </a:r>
+            <a:endParaRPr sz="2100" dirty="0">
+              <a:latin typeface="Arial Narrow"/>
+              <a:cs typeface="Arial Narrow"/>
+            </a:endParaRPr>
+          </a:p>
+          <a:p>
+            <a:pPr marL="752475">
+              <a:spcBef>
+                <a:spcPts val="810"/>
+              </a:spcBef>
+              <a:tabLst>
+                <a:tab pos="1844040" algn="l"/>
+              </a:tabLst>
+            </a:pPr>
+            <a:r>
+              <a:rPr sz="2100" b="1" spc="-8" dirty="0">
+                <a:latin typeface="Arial Narrow"/>
+                <a:cs typeface="Arial Narrow"/>
+              </a:rPr>
+              <a:t>interfa</a:t>
+            </a:r>
+            <a:r>
+              <a:rPr sz="2100" b="1" spc="-19" dirty="0">
+                <a:latin typeface="Arial Narrow"/>
+                <a:cs typeface="Arial Narrow"/>
+              </a:rPr>
+              <a:t>c</a:t>
+            </a:r>
+            <a:r>
+              <a:rPr sz="2100" b="1" spc="-11" dirty="0">
+                <a:latin typeface="Arial Narrow"/>
+                <a:cs typeface="Arial Narrow"/>
+              </a:rPr>
+              <a:t>e</a:t>
+            </a:r>
+            <a:r>
+              <a:rPr sz="2100" b="1" dirty="0">
+                <a:latin typeface="Arial Narrow"/>
+                <a:cs typeface="Arial Narrow"/>
+              </a:rPr>
+              <a:t>	</a:t>
+            </a:r>
+            <a:r>
+              <a:rPr sz="2100" b="1" spc="-11" dirty="0">
+                <a:solidFill>
+                  <a:srgbClr val="3333CC"/>
+                </a:solidFill>
+                <a:latin typeface="Arial Narrow"/>
+                <a:cs typeface="Arial Narrow"/>
+              </a:rPr>
+              <a:t>int_número</a:t>
+            </a:r>
+            <a:endParaRPr sz="2100" dirty="0">
+              <a:latin typeface="Arial Narrow"/>
+              <a:cs typeface="Arial Narrow"/>
+            </a:endParaRPr>
+          </a:p>
+          <a:p>
+            <a:pPr marL="752475">
+              <a:spcBef>
+                <a:spcPts val="1080"/>
+              </a:spcBef>
+              <a:tabLst>
+                <a:tab pos="2547938" algn="l"/>
+              </a:tabLst>
+            </a:pPr>
+            <a:r>
+              <a:rPr sz="2100" b="1" spc="-11" dirty="0">
+                <a:latin typeface="Arial Narrow"/>
+                <a:cs typeface="Arial Narrow"/>
+              </a:rPr>
+              <a:t>ip</a:t>
+            </a:r>
+            <a:r>
+              <a:rPr sz="2100" b="1" dirty="0">
+                <a:latin typeface="Arial Narrow"/>
+                <a:cs typeface="Arial Narrow"/>
+              </a:rPr>
+              <a:t> </a:t>
+            </a:r>
+            <a:r>
+              <a:rPr sz="2100" b="1" spc="-15" dirty="0">
+                <a:latin typeface="Arial Narrow"/>
+                <a:cs typeface="Arial Narrow"/>
+              </a:rPr>
               <a:t>access</a:t>
             </a:r>
             <a:r>
-              <a:rPr sz="1950" b="1" spc="-4" dirty="0">
+              <a:rPr sz="2100" b="1" spc="-11" dirty="0">
                 <a:latin typeface="Arial Narrow"/>
                 <a:cs typeface="Arial Narrow"/>
               </a:rPr>
-              <a:t>-</a:t>
-            </a:r>
-            <a:r>
-              <a:rPr sz="1950" b="1" dirty="0">
+              <a:t>-group</a:t>
+            </a:r>
+            <a:r>
+              <a:rPr sz="2100" b="1" dirty="0">
                 <a:latin typeface="Arial Narrow"/>
                 <a:cs typeface="Arial Narrow"/>
               </a:rPr>
-              <a:t>l</a:t>
-            </a:r>
-            <a:r>
-              <a:rPr sz="1950" b="1" spc="-11" dirty="0">
+              <a:t>	</a:t>
+            </a:r>
+            <a:r>
+              <a:rPr sz="2100" b="1" spc="-11" dirty="0">
+                <a:solidFill>
+                  <a:srgbClr val="3333CC"/>
+                </a:solidFill>
                 <a:latin typeface="Arial Narrow"/>
                 <a:cs typeface="Arial Narrow"/>
               </a:rPr>
-              <a:t>i</a:t>
-            </a:r>
-            <a:r>
-              <a:rPr sz="1950" b="1" spc="-4" dirty="0">
+              <a:t>número_lista</a:t>
+            </a:r>
+            <a:r>
+              <a:rPr sz="2100" b="1" spc="-4" dirty="0">
+                <a:solidFill>
+                  <a:srgbClr val="3333CC"/>
+                </a:solidFill>
                 <a:latin typeface="Arial Narrow"/>
                 <a:cs typeface="Arial Narrow"/>
               </a:rPr>
-              <a:t>s</a:t>
-            </a:r>
-            <a:r>
-              <a:rPr sz="1950" b="1" dirty="0">
+              <a:t> </a:t>
+            </a:r>
+            <a:r>
+              <a:rPr sz="2100" b="1" spc="-8" dirty="0">
                 <a:latin typeface="Arial Narrow"/>
                 <a:cs typeface="Arial Narrow"/>
               </a:rPr>
-              <a:t>t	</a:t>
-            </a:r>
-            <a:r>
-              <a:rPr sz="1950" b="1" dirty="0">
-                <a:solidFill>
-                  <a:srgbClr val="3333CC"/>
-                </a:solidFill>
+              <a:t>{in</a:t>
+            </a:r>
+            <a:r>
+              <a:rPr sz="2100" b="1" spc="-15" dirty="0">
                 <a:latin typeface="Arial Narrow"/>
                 <a:cs typeface="Arial Narrow"/>
               </a:rPr>
-              <a:t>número_lista</a:t>
-            </a:r>
-            <a:r>
-              <a:rPr sz="1950" b="1" spc="-26" dirty="0">
-                <a:solidFill>
-                  <a:srgbClr val="3333CC"/>
-                </a:solidFill>
+              <a:t> </a:t>
+            </a:r>
+            <a:r>
+              <a:rPr sz="2100" b="1" spc="-8" dirty="0">
                 <a:latin typeface="Arial Narrow"/>
                 <a:cs typeface="Arial Narrow"/>
               </a:rPr>
-              <a:t> </a:t>
-            </a:r>
-            <a:r>
-              <a:rPr sz="1950" b="1" spc="-4" dirty="0">
+              <a:t>|</a:t>
+            </a:r>
+            <a:r>
+              <a:rPr sz="2100" b="1" spc="8" dirty="0">
                 <a:latin typeface="Arial Narrow"/>
                 <a:cs typeface="Arial Narrow"/>
               </a:rPr>
-              <a:t>{</a:t>
-            </a:r>
-            <a:r>
-              <a:rPr sz="1950" b="1" dirty="0">
-                <a:solidFill>
-                  <a:srgbClr val="009900"/>
-                </a:solidFill>
+              <a:t> </a:t>
+            </a:r>
+            <a:r>
+              <a:rPr sz="2100" b="1" spc="-11" dirty="0">
                 <a:latin typeface="Arial Narrow"/>
                 <a:cs typeface="Arial Narrow"/>
               </a:rPr>
-              <a:t>permit</a:t>
-            </a:r>
-            <a:r>
-              <a:rPr sz="1950" b="1" spc="-11" dirty="0">
-                <a:solidFill>
-                  <a:srgbClr val="009900"/>
-                </a:solidFill>
+              <a:t>ou</a:t>
+            </a:r>
+            <a:r>
+              <a:rPr sz="2100" b="1" spc="-4" dirty="0">
                 <a:latin typeface="Arial Narrow"/>
                 <a:cs typeface="Arial Narrow"/>
               </a:rPr>
-              <a:t> </a:t>
-            </a:r>
-            <a:r>
-              <a:rPr sz="1950" b="1" dirty="0">
+              <a:t>t</a:t>
+            </a:r>
+            <a:r>
+              <a:rPr sz="2100" b="1" spc="-8" dirty="0">
                 <a:latin typeface="Arial Narrow"/>
                 <a:cs typeface="Arial Narrow"/>
               </a:rPr>
-              <a:t>|</a:t>
-            </a:r>
-            <a:r>
-              <a:rPr sz="1950" b="1" spc="-4" dirty="0">
-                <a:latin typeface="Arial Narrow"/>
-                <a:cs typeface="Arial Narrow"/>
-              </a:rPr>
-              <a:t> </a:t>
-            </a:r>
-            <a:r>
-              <a:rPr sz="1950" b="1" dirty="0">
-                <a:solidFill>
-                  <a:srgbClr val="FF3300"/>
-                </a:solidFill>
-                <a:latin typeface="Arial Narrow"/>
-                <a:cs typeface="Arial Narrow"/>
-              </a:rPr>
-              <a:t>den</a:t>
-            </a:r>
-            <a:r>
-              <a:rPr sz="1950" b="1" spc="4" dirty="0">
-                <a:solidFill>
-                  <a:srgbClr val="FF3300"/>
-                </a:solidFill>
-                <a:latin typeface="Arial Narrow"/>
-                <a:cs typeface="Arial Narrow"/>
-              </a:rPr>
-              <a:t>y</a:t>
-            </a:r>
-            <a:r>
-              <a:rPr sz="1950" b="1" dirty="0">
-                <a:latin typeface="Arial Narrow"/>
-                <a:cs typeface="Arial Narrow"/>
-              </a:rPr>
               <a:t>}</a:t>
             </a:r>
-            <a:r>
-              <a:rPr sz="1950" b="1" spc="-26" dirty="0">
-                <a:latin typeface="Arial Narrow"/>
-                <a:cs typeface="Arial Narrow"/>
-              </a:rPr>
-              <a:t> </a:t>
-            </a:r>
-            <a:r>
-              <a:rPr sz="1950" b="1" dirty="0">
-                <a:solidFill>
-                  <a:srgbClr val="3333CC"/>
-                </a:solidFill>
-                <a:latin typeface="Arial Narrow"/>
-                <a:cs typeface="Arial Narrow"/>
-              </a:rPr>
-              <a:t>IP_O</a:t>
-            </a:r>
-            <a:r>
-              <a:rPr sz="1950" b="1" spc="-11" dirty="0">
-                <a:solidFill>
-                  <a:srgbClr val="3333CC"/>
-                </a:solidFill>
-                <a:latin typeface="Arial Narrow"/>
-                <a:cs typeface="Arial Narrow"/>
-              </a:rPr>
-              <a:t>r</a:t>
-            </a:r>
-            <a:r>
-              <a:rPr sz="1950" b="1" dirty="0">
-                <a:solidFill>
-                  <a:srgbClr val="3333CC"/>
-                </a:solidFill>
-                <a:latin typeface="Arial Narrow"/>
-                <a:cs typeface="Arial Narrow"/>
-              </a:rPr>
-              <a:t>igen	</a:t>
-            </a:r>
-            <a:r>
-              <a:rPr sz="1950" b="1" spc="-4" dirty="0">
-                <a:solidFill>
-                  <a:srgbClr val="3333CC"/>
-                </a:solidFill>
-                <a:latin typeface="Arial Narrow"/>
-                <a:cs typeface="Arial Narrow"/>
-              </a:rPr>
-              <a:t>w</a:t>
-            </a:r>
-            <a:r>
-              <a:rPr sz="1950" b="1" spc="-11" dirty="0">
-                <a:solidFill>
-                  <a:srgbClr val="3333CC"/>
-                </a:solidFill>
-                <a:latin typeface="Arial Narrow"/>
-                <a:cs typeface="Arial Narrow"/>
-              </a:rPr>
-              <a:t>i</a:t>
-            </a:r>
-            <a:r>
-              <a:rPr sz="1950" b="1" dirty="0">
-                <a:solidFill>
-                  <a:srgbClr val="3333CC"/>
-                </a:solidFill>
-                <a:latin typeface="Arial Narrow"/>
-                <a:cs typeface="Arial Narrow"/>
-              </a:rPr>
-              <a:t>ldcard</a:t>
-            </a:r>
-            <a:endParaRPr sz="1950" dirty="0">
+            <a:endParaRPr sz="2100" dirty="0">
               <a:latin typeface="Arial Narrow"/>
               <a:cs typeface="Arial Narrow"/>
             </a:endParaRPr>
@@ -18190,425 +17040,10 @@
       </p:sp>
       <p:sp>
         <p:nvSpPr>
-          <p:cNvPr id="5" name="object 5"/>
-          <p:cNvSpPr txBox="1"/>
-          <p:nvPr/>
-        </p:nvSpPr>
-        <p:spPr>
-          <a:xfrm>
-            <a:off x="2459546" y="4297815"/>
-            <a:ext cx="4122420" cy="787395"/>
-          </a:xfrm>
-          <a:prstGeom prst="rect">
-            <a:avLst/>
-          </a:prstGeom>
-        </p:spPr>
-        <p:txBody>
-          <a:bodyPr vert="horz" wrap="square" lIns="0" tIns="0" rIns="0" bIns="0" rtlCol="0">
-            <a:spAutoFit/>
-          </a:bodyPr>
-          <a:lstStyle/>
-          <a:p>
-            <a:pPr marL="9525">
-              <a:tabLst>
-                <a:tab pos="1101090" algn="l"/>
-              </a:tabLst>
-            </a:pPr>
-            <a:r>
-              <a:rPr sz="2100" b="1" spc="-8" dirty="0">
-                <a:latin typeface="Arial Narrow"/>
-                <a:cs typeface="Arial Narrow"/>
-              </a:rPr>
-              <a:t>interfa</a:t>
-            </a:r>
-            <a:r>
-              <a:rPr sz="2100" b="1" spc="-19" dirty="0">
-                <a:latin typeface="Arial Narrow"/>
-                <a:cs typeface="Arial Narrow"/>
-              </a:rPr>
-              <a:t>c</a:t>
-            </a:r>
-            <a:r>
-              <a:rPr sz="2100" b="1" spc="-11" dirty="0">
-                <a:latin typeface="Arial Narrow"/>
-                <a:cs typeface="Arial Narrow"/>
-              </a:rPr>
-              <a:t>e</a:t>
-            </a:r>
-            <a:r>
-              <a:rPr sz="2100" b="1" dirty="0">
-                <a:latin typeface="Arial Narrow"/>
-                <a:cs typeface="Arial Narrow"/>
-              </a:rPr>
-              <a:t>	</a:t>
-            </a:r>
-            <a:r>
-              <a:rPr sz="2100" b="1" spc="-11" dirty="0">
-                <a:solidFill>
-                  <a:srgbClr val="3333CC"/>
-                </a:solidFill>
-                <a:latin typeface="Arial Narrow"/>
-                <a:cs typeface="Arial Narrow"/>
-              </a:rPr>
-              <a:t>int_número</a:t>
-            </a:r>
-            <a:endParaRPr sz="2100" dirty="0">
-              <a:latin typeface="Arial Narrow"/>
-              <a:cs typeface="Arial Narrow"/>
-            </a:endParaRPr>
-          </a:p>
-          <a:p>
-            <a:pPr marL="9525">
-              <a:spcBef>
-                <a:spcPts val="1080"/>
-              </a:spcBef>
-              <a:tabLst>
-                <a:tab pos="1804988" algn="l"/>
-              </a:tabLst>
-            </a:pPr>
-            <a:r>
-              <a:rPr sz="2100" b="1" spc="-11" dirty="0">
-                <a:latin typeface="Arial Narrow"/>
-                <a:cs typeface="Arial Narrow"/>
-              </a:rPr>
-              <a:t>ip</a:t>
-            </a:r>
-            <a:r>
-              <a:rPr sz="2100" b="1" dirty="0">
-                <a:latin typeface="Arial Narrow"/>
-                <a:cs typeface="Arial Narrow"/>
-              </a:rPr>
-              <a:t> </a:t>
-            </a:r>
-            <a:r>
-              <a:rPr sz="2100" b="1" spc="-15" dirty="0">
-                <a:latin typeface="Arial Narrow"/>
-                <a:cs typeface="Arial Narrow"/>
-              </a:rPr>
-              <a:t>access</a:t>
-            </a:r>
-            <a:r>
-              <a:rPr sz="2100" b="1" spc="-11" dirty="0">
-                <a:latin typeface="Arial Narrow"/>
-                <a:cs typeface="Arial Narrow"/>
-              </a:rPr>
-              <a:t>-group</a:t>
-            </a:r>
-            <a:r>
-              <a:rPr sz="2100" b="1" dirty="0">
-                <a:latin typeface="Arial Narrow"/>
-                <a:cs typeface="Arial Narrow"/>
-              </a:rPr>
-              <a:t>	</a:t>
-            </a:r>
-            <a:r>
-              <a:rPr sz="2100" b="1" spc="-11" dirty="0">
-                <a:solidFill>
-                  <a:srgbClr val="3333CC"/>
-                </a:solidFill>
-                <a:latin typeface="Arial Narrow"/>
-                <a:cs typeface="Arial Narrow"/>
-              </a:rPr>
-              <a:t>número_lista</a:t>
-            </a:r>
-            <a:r>
-              <a:rPr sz="2100" b="1" spc="-4" dirty="0">
-                <a:solidFill>
-                  <a:srgbClr val="3333CC"/>
-                </a:solidFill>
-                <a:latin typeface="Arial Narrow"/>
-                <a:cs typeface="Arial Narrow"/>
-              </a:rPr>
-              <a:t> </a:t>
-            </a:r>
-            <a:r>
-              <a:rPr sz="2100" b="1" spc="-8" dirty="0">
-                <a:latin typeface="Arial Narrow"/>
-                <a:cs typeface="Arial Narrow"/>
-              </a:rPr>
-              <a:t>{in</a:t>
-            </a:r>
-            <a:r>
-              <a:rPr sz="2100" b="1" spc="-15" dirty="0">
-                <a:latin typeface="Arial Narrow"/>
-                <a:cs typeface="Arial Narrow"/>
-              </a:rPr>
-              <a:t> </a:t>
-            </a:r>
-            <a:r>
-              <a:rPr sz="2100" b="1" spc="-8" dirty="0">
-                <a:latin typeface="Arial Narrow"/>
-                <a:cs typeface="Arial Narrow"/>
-              </a:rPr>
-              <a:t>|</a:t>
-            </a:r>
-            <a:r>
-              <a:rPr sz="2100" b="1" spc="8" dirty="0">
-                <a:latin typeface="Arial Narrow"/>
-                <a:cs typeface="Arial Narrow"/>
-              </a:rPr>
-              <a:t> </a:t>
-            </a:r>
-            <a:r>
-              <a:rPr sz="2100" b="1" spc="-11" dirty="0">
-                <a:latin typeface="Arial Narrow"/>
-                <a:cs typeface="Arial Narrow"/>
-              </a:rPr>
-              <a:t>out}</a:t>
-            </a:r>
-            <a:endParaRPr sz="2100" dirty="0">
-              <a:latin typeface="Arial Narrow"/>
-              <a:cs typeface="Arial Narrow"/>
-            </a:endParaRPr>
-          </a:p>
-        </p:txBody>
-      </p:sp>
-      <p:sp>
-        <p:nvSpPr>
-          <p:cNvPr id="6" name="object 6"/>
-          <p:cNvSpPr txBox="1"/>
-          <p:nvPr/>
-        </p:nvSpPr>
-        <p:spPr>
-          <a:xfrm>
-            <a:off x="1657350" y="3486151"/>
-            <a:ext cx="5657850" cy="646331"/>
-          </a:xfrm>
-          <a:prstGeom prst="rect">
-            <a:avLst/>
-          </a:prstGeom>
-          <a:solidFill>
-            <a:srgbClr val="FFFF00"/>
-          </a:solidFill>
-        </p:spPr>
-        <p:txBody>
-          <a:bodyPr vert="horz" wrap="square" lIns="0" tIns="0" rIns="0" bIns="0" rtlCol="0">
-            <a:spAutoFit/>
-          </a:bodyPr>
-          <a:lstStyle/>
-          <a:p>
-            <a:pPr marL="68580" marR="62389">
-              <a:tabLst>
-                <a:tab pos="1354454" algn="l"/>
-                <a:tab pos="1716881" algn="l"/>
-                <a:tab pos="2005965" algn="l"/>
-                <a:tab pos="2551271" algn="l"/>
-                <a:tab pos="2913697" algn="l"/>
-                <a:tab pos="3760946" algn="l"/>
-                <a:tab pos="4123373" algn="l"/>
-                <a:tab pos="4971098" algn="l"/>
-                <a:tab pos="5199698" algn="l"/>
-              </a:tabLst>
-            </a:pPr>
-            <a:r>
-              <a:rPr sz="2100" b="1" spc="-11" dirty="0">
-                <a:latin typeface="Arial Narrow"/>
-                <a:cs typeface="Arial Narrow"/>
-              </a:rPr>
-              <a:t>Asignación	de	la</a:t>
-            </a:r>
-            <a:r>
-              <a:rPr sz="2100" b="1" dirty="0">
-                <a:latin typeface="Arial Narrow"/>
-                <a:cs typeface="Arial Narrow"/>
-              </a:rPr>
-              <a:t>	</a:t>
-            </a:r>
-            <a:r>
-              <a:rPr sz="2100" b="1" spc="-8" dirty="0">
-                <a:latin typeface="Arial Narrow"/>
-                <a:cs typeface="Arial Narrow"/>
-              </a:rPr>
-              <a:t>lis</a:t>
-            </a:r>
-            <a:r>
-              <a:rPr sz="2100" b="1" spc="-4" dirty="0">
-                <a:latin typeface="Arial Narrow"/>
-                <a:cs typeface="Arial Narrow"/>
-              </a:rPr>
-              <a:t>t</a:t>
-            </a:r>
-            <a:r>
-              <a:rPr sz="2100" b="1" spc="-11" dirty="0">
-                <a:latin typeface="Arial Narrow"/>
-                <a:cs typeface="Arial Narrow"/>
-              </a:rPr>
-              <a:t>a</a:t>
-            </a:r>
-            <a:r>
-              <a:rPr sz="2100" b="1" dirty="0">
-                <a:latin typeface="Arial Narrow"/>
-                <a:cs typeface="Arial Narrow"/>
-              </a:rPr>
-              <a:t>	</a:t>
-            </a:r>
-            <a:r>
-              <a:rPr sz="2100" b="1" spc="-11" dirty="0">
-                <a:latin typeface="Arial Narrow"/>
-                <a:cs typeface="Arial Narrow"/>
-              </a:rPr>
-              <a:t>de</a:t>
-            </a:r>
-            <a:r>
-              <a:rPr sz="2100" b="1" dirty="0">
-                <a:latin typeface="Arial Narrow"/>
-                <a:cs typeface="Arial Narrow"/>
-              </a:rPr>
-              <a:t>	</a:t>
-            </a:r>
-            <a:r>
-              <a:rPr sz="2100" b="1" spc="-15" dirty="0">
-                <a:latin typeface="Arial Narrow"/>
-                <a:cs typeface="Arial Narrow"/>
-              </a:rPr>
-              <a:t>contro</a:t>
-            </a:r>
-            <a:r>
-              <a:rPr sz="2100" b="1" spc="-8" dirty="0">
-                <a:latin typeface="Arial Narrow"/>
-                <a:cs typeface="Arial Narrow"/>
-              </a:rPr>
-              <a:t>l</a:t>
-            </a:r>
-            <a:r>
-              <a:rPr sz="2100" b="1" dirty="0">
-                <a:latin typeface="Arial Narrow"/>
-                <a:cs typeface="Arial Narrow"/>
-              </a:rPr>
-              <a:t>	</a:t>
-            </a:r>
-            <a:r>
-              <a:rPr sz="2100" b="1" spc="-11" dirty="0">
-                <a:latin typeface="Arial Narrow"/>
-                <a:cs typeface="Arial Narrow"/>
-              </a:rPr>
-              <a:t>de</a:t>
-            </a:r>
-            <a:r>
-              <a:rPr sz="2100" b="1" dirty="0">
-                <a:latin typeface="Arial Narrow"/>
-                <a:cs typeface="Arial Narrow"/>
-              </a:rPr>
-              <a:t>	</a:t>
-            </a:r>
-            <a:r>
-              <a:rPr sz="2100" b="1" spc="-15" dirty="0">
-                <a:latin typeface="Arial Narrow"/>
-                <a:cs typeface="Arial Narrow"/>
-              </a:rPr>
-              <a:t>acces</a:t>
-            </a:r>
-            <a:r>
-              <a:rPr sz="2100" b="1" spc="-11" dirty="0">
-                <a:latin typeface="Arial Narrow"/>
-                <a:cs typeface="Arial Narrow"/>
-              </a:rPr>
-              <a:t>o</a:t>
-            </a:r>
-            <a:r>
-              <a:rPr sz="2100" b="1" dirty="0">
-                <a:latin typeface="Arial Narrow"/>
-                <a:cs typeface="Arial Narrow"/>
-              </a:rPr>
-              <a:t>	</a:t>
-            </a:r>
-            <a:r>
-              <a:rPr sz="2100" b="1" spc="-11" dirty="0">
-                <a:latin typeface="Arial Narrow"/>
-                <a:cs typeface="Arial Narrow"/>
-              </a:rPr>
-              <a:t>a</a:t>
-            </a:r>
-            <a:r>
-              <a:rPr sz="2100" b="1" dirty="0">
-                <a:latin typeface="Arial Narrow"/>
-                <a:cs typeface="Arial Narrow"/>
-              </a:rPr>
-              <a:t>	</a:t>
-            </a:r>
-            <a:r>
-              <a:rPr sz="2100" b="1" spc="-11" dirty="0">
-                <a:latin typeface="Arial Narrow"/>
-                <a:cs typeface="Arial Narrow"/>
-              </a:rPr>
-              <a:t>una</a:t>
-            </a:r>
-            <a:r>
-              <a:rPr sz="2100" b="1" spc="-8" dirty="0">
-                <a:latin typeface="Arial Narrow"/>
-                <a:cs typeface="Arial Narrow"/>
-              </a:rPr>
-              <a:t> interfaz </a:t>
-            </a:r>
-            <a:r>
-              <a:rPr sz="2100" b="1" spc="-11" dirty="0">
-                <a:latin typeface="Arial Narrow"/>
-                <a:cs typeface="Arial Narrow"/>
-              </a:rPr>
-              <a:t>del</a:t>
-            </a:r>
-            <a:r>
-              <a:rPr sz="2100" b="1" spc="-4" dirty="0">
-                <a:latin typeface="Arial Narrow"/>
-                <a:cs typeface="Arial Narrow"/>
-              </a:rPr>
-              <a:t> </a:t>
-            </a:r>
-            <a:r>
-              <a:rPr sz="2100" b="1" spc="-11" dirty="0">
-                <a:latin typeface="Arial Narrow"/>
-                <a:cs typeface="Arial Narrow"/>
-              </a:rPr>
-              <a:t>ru</a:t>
-            </a:r>
-            <a:r>
-              <a:rPr sz="2100" b="1" spc="-4" dirty="0">
-                <a:latin typeface="Arial Narrow"/>
-                <a:cs typeface="Arial Narrow"/>
-              </a:rPr>
-              <a:t>t</a:t>
-            </a:r>
-            <a:r>
-              <a:rPr sz="2100" b="1" spc="-15" dirty="0">
-                <a:latin typeface="Arial Narrow"/>
-                <a:cs typeface="Arial Narrow"/>
-              </a:rPr>
-              <a:t>ead</a:t>
-            </a:r>
-            <a:r>
-              <a:rPr sz="2100" b="1" spc="-8" dirty="0">
-                <a:latin typeface="Arial Narrow"/>
-                <a:cs typeface="Arial Narrow"/>
-              </a:rPr>
-              <a:t>o</a:t>
-            </a:r>
-            <a:r>
-              <a:rPr sz="2100" b="1" spc="-19" dirty="0">
-                <a:latin typeface="Arial Narrow"/>
-                <a:cs typeface="Arial Narrow"/>
-              </a:rPr>
-              <a:t>r</a:t>
-            </a:r>
-            <a:r>
-              <a:rPr sz="2100" b="1" spc="-8" dirty="0">
-                <a:latin typeface="Arial Narrow"/>
-                <a:cs typeface="Arial Narrow"/>
-              </a:rPr>
-              <a:t>:</a:t>
-            </a:r>
-            <a:endParaRPr sz="2100">
-              <a:latin typeface="Arial Narrow"/>
-              <a:cs typeface="Arial Narrow"/>
-            </a:endParaRPr>
-          </a:p>
-        </p:txBody>
-      </p:sp>
-      <p:sp>
-        <p:nvSpPr>
-          <p:cNvPr id="9" name="object 2">
+          <p:cNvPr id="8" name="object 2">
             <a:extLst>
               <a:ext uri="{FF2B5EF4-FFF2-40B4-BE49-F238E27FC236}">
-                <a16:creationId xmlns:a16="http://schemas.microsoft.com/office/drawing/2014/main" id="{FBFAB779-6C8D-4564-B1B0-4396CFA65968}"/>
+                <a16:creationId xmlns:a16="http://schemas.microsoft.com/office/drawing/2014/main" id="{257E321D-AB3B-4F6E-89EC-D5AD1090E97F}"/>
               </a:ext>
             </a:extLst>
           </p:cNvPr>
@@ -18657,12 +17092,17 @@
                 </a:solidFill>
                 <a:latin typeface="Dom Casual"/>
               </a:rPr>
-              <a:t>Comandos para crear listas de control de acceso estándar</a:t>
+              <a:t>Comandos para crear listas de control de acceso extendidas</a:t>
             </a:r>
           </a:p>
         </p:txBody>
       </p:sp>
     </p:spTree>
+    <p:extLst>
+      <p:ext uri="{BB962C8B-B14F-4D97-AF65-F5344CB8AC3E}">
+        <p14:creationId xmlns:p14="http://schemas.microsoft.com/office/powerpoint/2010/main" val="1726275846"/>
+      </p:ext>
+    </p:extLst>
   </p:cSld>
   <p:clrMapOvr>
     <a:masterClrMapping/>

--- a/Calendario2025/Presentaciones/11_1_ACLs.pptx
+++ b/Calendario2025/Presentaciones/11_1_ACLs.pptx
@@ -221,7 +221,7 @@
           <a:p>
             <a:fld id="{2D445F07-8756-451B-A938-0248325FC7BB}" type="datetimeFigureOut">
               <a:rPr lang="es-MX" smtClean="0"/>
-              <a:t>15/04/2025</a:t>
+              <a:t>21/04/2025</a:t>
             </a:fld>
             <a:endParaRPr lang="es-MX" dirty="0"/>
           </a:p>
@@ -618,24 +618,7 @@
           <a:lstStyle/>
           <a:p>
             <a:pPr rtl="0"/>
-            <a:r>
-              <a:rPr lang="es-419"/>
-              <a:t>5.0 - ACL para la configuración IPv4	</a:t>
-            </a:r>
-          </a:p>
-          <a:p>
-            <a:pPr rtl="0"/>
-            <a:r>
-              <a:rPr lang="es-419"/>
-              <a:t>5.4 Configuración de ACL IPv4 extendidas</a:t>
-            </a:r>
-          </a:p>
-          <a:p>
-            <a:pPr rtl="0"/>
-            <a:r>
-              <a:rPr lang="es-419"/>
-              <a:t>5.4.3 — Protocolos y puertos</a:t>
-            </a:r>
+            <a:endParaRPr lang="es-419" dirty="0"/>
           </a:p>
         </p:txBody>
       </p:sp>
@@ -721,24 +704,7 @@
           <a:lstStyle/>
           <a:p>
             <a:pPr rtl="0"/>
-            <a:r>
-              <a:rPr lang="es-419"/>
-              <a:t>5.0 - ACL para la configuración IPv4	</a:t>
-            </a:r>
-          </a:p>
-          <a:p>
-            <a:pPr rtl="0"/>
-            <a:r>
-              <a:rPr lang="es-419"/>
-              <a:t>5.4 Configuración de ACL IPv4 extendidas</a:t>
-            </a:r>
-          </a:p>
-          <a:p>
-            <a:pPr rtl="0"/>
-            <a:r>
-              <a:rPr lang="es-419"/>
-              <a:t>5.4.3 — Protocolos y puertos</a:t>
-            </a:r>
+            <a:endParaRPr lang="es-419" dirty="0"/>
           </a:p>
         </p:txBody>
       </p:sp>
@@ -824,24 +790,7 @@
           <a:lstStyle/>
           <a:p>
             <a:pPr rtl="0"/>
-            <a:r>
-              <a:rPr lang="es-419"/>
-              <a:t>5.0 - ACL para la configuración IPv4	</a:t>
-            </a:r>
-          </a:p>
-          <a:p>
-            <a:pPr rtl="0"/>
-            <a:r>
-              <a:rPr lang="es-419"/>
-              <a:t>5.4 Configuración de ACL IPv4 extendidas</a:t>
-            </a:r>
-          </a:p>
-          <a:p>
-            <a:pPr rtl="0"/>
-            <a:r>
-              <a:rPr lang="es-419"/>
-              <a:t>5.4.4 — Ejemplos de configuración de protocolos y números de puerto</a:t>
-            </a:r>
+            <a:endParaRPr lang="es-419" dirty="0"/>
           </a:p>
         </p:txBody>
       </p:sp>
@@ -1743,7 +1692,7 @@
           <a:p>
             <a:fld id="{5E75A0DC-66C6-4CEC-A5EB-F8C97CEC3796}" type="datetimeFigureOut">
               <a:rPr lang="es-MX" smtClean="0"/>
-              <a:t>15/04/2025</a:t>
+              <a:t>21/04/2025</a:t>
             </a:fld>
             <a:endParaRPr lang="es-MX" dirty="0"/>
           </a:p>
@@ -1913,7 +1862,7 @@
           <a:p>
             <a:fld id="{5E75A0DC-66C6-4CEC-A5EB-F8C97CEC3796}" type="datetimeFigureOut">
               <a:rPr lang="es-MX" smtClean="0"/>
-              <a:t>15/04/2025</a:t>
+              <a:t>21/04/2025</a:t>
             </a:fld>
             <a:endParaRPr lang="es-MX" dirty="0"/>
           </a:p>
@@ -2093,7 +2042,7 @@
           <a:p>
             <a:fld id="{5E75A0DC-66C6-4CEC-A5EB-F8C97CEC3796}" type="datetimeFigureOut">
               <a:rPr lang="es-MX" smtClean="0"/>
-              <a:t>15/04/2025</a:t>
+              <a:t>21/04/2025</a:t>
             </a:fld>
             <a:endParaRPr lang="es-MX" dirty="0"/>
           </a:p>
@@ -2307,7 +2256,7 @@
         <p:fade/>
       </p:transition>
     </mc:Choice>
-    <mc:Fallback xmlns="" xmlns:c15="http://schemas.microsoft.com/office/drawing/2012/chart" xmlns:c="http://schemas.openxmlformats.org/drawingml/2006/chart">
+    <mc:Fallback xmlns:c="http://schemas.openxmlformats.org/drawingml/2006/chart" xmlns:c15="http://schemas.microsoft.com/office/drawing/2012/chart" xmlns="">
       <p:transition xmlns:p14="http://schemas.microsoft.com/office/powerpoint/2010/main" spd="med">
         <p:fade/>
       </p:transition>
@@ -2425,7 +2374,7 @@
           <a:p>
             <a:fld id="{5E75A0DC-66C6-4CEC-A5EB-F8C97CEC3796}" type="datetimeFigureOut">
               <a:rPr lang="es-MX" smtClean="0"/>
-              <a:t>15/04/2025</a:t>
+              <a:t>21/04/2025</a:t>
             </a:fld>
             <a:endParaRPr lang="es-MX" dirty="0"/>
           </a:p>
@@ -2671,7 +2620,7 @@
           <a:p>
             <a:fld id="{5E75A0DC-66C6-4CEC-A5EB-F8C97CEC3796}" type="datetimeFigureOut">
               <a:rPr lang="es-MX" smtClean="0"/>
-              <a:t>15/04/2025</a:t>
+              <a:t>21/04/2025</a:t>
             </a:fld>
             <a:endParaRPr lang="es-MX" dirty="0"/>
           </a:p>
@@ -2959,7 +2908,7 @@
           <a:p>
             <a:fld id="{5E75A0DC-66C6-4CEC-A5EB-F8C97CEC3796}" type="datetimeFigureOut">
               <a:rPr lang="es-MX" smtClean="0"/>
-              <a:t>15/04/2025</a:t>
+              <a:t>21/04/2025</a:t>
             </a:fld>
             <a:endParaRPr lang="es-MX" dirty="0"/>
           </a:p>
@@ -3381,7 +3330,7 @@
           <a:p>
             <a:fld id="{5E75A0DC-66C6-4CEC-A5EB-F8C97CEC3796}" type="datetimeFigureOut">
               <a:rPr lang="es-MX" smtClean="0"/>
-              <a:t>15/04/2025</a:t>
+              <a:t>21/04/2025</a:t>
             </a:fld>
             <a:endParaRPr lang="es-MX" dirty="0"/>
           </a:p>
@@ -3499,7 +3448,7 @@
           <a:p>
             <a:fld id="{5E75A0DC-66C6-4CEC-A5EB-F8C97CEC3796}" type="datetimeFigureOut">
               <a:rPr lang="es-MX" smtClean="0"/>
-              <a:t>15/04/2025</a:t>
+              <a:t>21/04/2025</a:t>
             </a:fld>
             <a:endParaRPr lang="es-MX" dirty="0"/>
           </a:p>
@@ -3594,7 +3543,7 @@
           <a:p>
             <a:fld id="{5E75A0DC-66C6-4CEC-A5EB-F8C97CEC3796}" type="datetimeFigureOut">
               <a:rPr lang="es-MX" smtClean="0"/>
-              <a:t>15/04/2025</a:t>
+              <a:t>21/04/2025</a:t>
             </a:fld>
             <a:endParaRPr lang="es-MX" dirty="0"/>
           </a:p>
@@ -3871,7 +3820,7 @@
           <a:p>
             <a:fld id="{5E75A0DC-66C6-4CEC-A5EB-F8C97CEC3796}" type="datetimeFigureOut">
               <a:rPr lang="es-MX" smtClean="0"/>
-              <a:t>15/04/2025</a:t>
+              <a:t>21/04/2025</a:t>
             </a:fld>
             <a:endParaRPr lang="es-MX" dirty="0"/>
           </a:p>
@@ -4124,7 +4073,7 @@
           <a:p>
             <a:fld id="{5E75A0DC-66C6-4CEC-A5EB-F8C97CEC3796}" type="datetimeFigureOut">
               <a:rPr lang="es-MX" smtClean="0"/>
-              <a:t>15/04/2025</a:t>
+              <a:t>21/04/2025</a:t>
             </a:fld>
             <a:endParaRPr lang="es-MX" dirty="0"/>
           </a:p>
@@ -4337,7 +4286,7 @@
           <a:p>
             <a:fld id="{5E75A0DC-66C6-4CEC-A5EB-F8C97CEC3796}" type="datetimeFigureOut">
               <a:rPr lang="es-MX" smtClean="0"/>
-              <a:t>15/04/2025</a:t>
+              <a:t>21/04/2025</a:t>
             </a:fld>
             <a:endParaRPr lang="es-MX" dirty="0"/>
           </a:p>
@@ -5110,7 +5059,7 @@
         <p:fade/>
       </p:transition>
     </mc:Choice>
-    <mc:Fallback xmlns:c15="http://schemas.microsoft.com/office/drawing/2012/chart" xmlns:c="http://schemas.openxmlformats.org/drawingml/2006/chart" xmlns="">
+    <mc:Fallback xmlns="" xmlns:c="http://schemas.openxmlformats.org/drawingml/2006/chart" xmlns:c15="http://schemas.microsoft.com/office/drawing/2012/chart">
       <p:transition spd="med">
         <p:fade/>
       </p:transition>
@@ -5282,7 +5231,7 @@
         <p:fade/>
       </p:transition>
     </mc:Choice>
-    <mc:Fallback xmlns:c15="http://schemas.microsoft.com/office/drawing/2012/chart" xmlns:c="http://schemas.openxmlformats.org/drawingml/2006/chart" xmlns="">
+    <mc:Fallback xmlns="" xmlns:c="http://schemas.openxmlformats.org/drawingml/2006/chart" xmlns:c15="http://schemas.microsoft.com/office/drawing/2012/chart">
       <p:transition spd="med">
         <p:fade/>
       </p:transition>
@@ -5740,7 +5689,7 @@
         <p:fade/>
       </p:transition>
     </mc:Choice>
-    <mc:Fallback xmlns:c15="http://schemas.microsoft.com/office/drawing/2012/chart" xmlns:c="http://schemas.openxmlformats.org/drawingml/2006/chart" xmlns="">
+    <mc:Fallback xmlns="" xmlns:c="http://schemas.openxmlformats.org/drawingml/2006/chart" xmlns:c15="http://schemas.microsoft.com/office/drawing/2012/chart">
       <p:transition spd="med">
         <p:fade/>
       </p:transition>
@@ -15278,7 +15227,7 @@
                 </a:solidFill>
                 <a:cs typeface="Times New Roman"/>
               </a:rPr>
-              <a:t>  ignora el significado del bit, por lo tanto esta máscara comodín permite cualquier IP.</a:t>
+              <a:t>  ignora el significado del bit, por lo tanto, esta máscara comodín permite cualquier IP.</a:t>
             </a:r>
           </a:p>
           <a:p>
